--- a/1.1 Introdution/1.1 Intro.pptx
+++ b/1.1 Introdution/1.1 Intro.pptx
@@ -17,6 +17,15 @@
     <p:sldId id="265" r:id="rId11"/>
     <p:sldId id="266" r:id="rId12"/>
     <p:sldId id="267" r:id="rId13"/>
+    <p:sldId id="268" r:id="rId14"/>
+    <p:sldId id="269" r:id="rId15"/>
+    <p:sldId id="270" r:id="rId16"/>
+    <p:sldId id="271" r:id="rId17"/>
+    <p:sldId id="272" r:id="rId18"/>
+    <p:sldId id="273" r:id="rId19"/>
+    <p:sldId id="274" r:id="rId20"/>
+    <p:sldId id="275" r:id="rId21"/>
+    <p:sldId id="276" r:id="rId22"/>
   </p:sldIdLst>
   <p:sldSz cx="12192000" cy="6858000"/>
   <p:notesSz cx="6858000" cy="9144000"/>
@@ -323,7 +332,7 @@
           <a:p>
             <a:fld id="{80E38E48-C2A3-4581-BEEE-BDFDC959DF33}" type="datetimeFigureOut">
               <a:rPr lang="ru-RU" smtClean="0"/>
-              <a:t>27.08.2026</a:t>
+              <a:t>30.08.2026</a:t>
             </a:fld>
             <a:endParaRPr lang="ru-RU"/>
           </a:p>
@@ -513,7 +522,7 @@
           <a:p>
             <a:fld id="{80E38E48-C2A3-4581-BEEE-BDFDC959DF33}" type="datetimeFigureOut">
               <a:rPr lang="ru-RU" smtClean="0"/>
-              <a:t>27.08.2026</a:t>
+              <a:t>30.08.2026</a:t>
             </a:fld>
             <a:endParaRPr lang="ru-RU"/>
           </a:p>
@@ -693,7 +702,7 @@
           <a:p>
             <a:fld id="{80E38E48-C2A3-4581-BEEE-BDFDC959DF33}" type="datetimeFigureOut">
               <a:rPr lang="ru-RU" smtClean="0"/>
-              <a:t>27.08.2026</a:t>
+              <a:t>30.08.2026</a:t>
             </a:fld>
             <a:endParaRPr lang="ru-RU"/>
           </a:p>
@@ -863,7 +872,7 @@
           <a:p>
             <a:fld id="{80E38E48-C2A3-4581-BEEE-BDFDC959DF33}" type="datetimeFigureOut">
               <a:rPr lang="ru-RU" smtClean="0"/>
-              <a:t>27.08.2026</a:t>
+              <a:t>30.08.2026</a:t>
             </a:fld>
             <a:endParaRPr lang="ru-RU"/>
           </a:p>
@@ -1119,7 +1128,7 @@
           <a:p>
             <a:fld id="{80E38E48-C2A3-4581-BEEE-BDFDC959DF33}" type="datetimeFigureOut">
               <a:rPr lang="ru-RU" smtClean="0"/>
-              <a:t>27.08.2026</a:t>
+              <a:t>30.08.2026</a:t>
             </a:fld>
             <a:endParaRPr lang="ru-RU"/>
           </a:p>
@@ -1407,7 +1416,7 @@
           <a:p>
             <a:fld id="{80E38E48-C2A3-4581-BEEE-BDFDC959DF33}" type="datetimeFigureOut">
               <a:rPr lang="ru-RU" smtClean="0"/>
-              <a:t>27.08.2026</a:t>
+              <a:t>30.08.2026</a:t>
             </a:fld>
             <a:endParaRPr lang="ru-RU"/>
           </a:p>
@@ -1845,7 +1854,7 @@
           <a:p>
             <a:fld id="{80E38E48-C2A3-4581-BEEE-BDFDC959DF33}" type="datetimeFigureOut">
               <a:rPr lang="ru-RU" smtClean="0"/>
-              <a:t>27.08.2026</a:t>
+              <a:t>30.08.2026</a:t>
             </a:fld>
             <a:endParaRPr lang="ru-RU"/>
           </a:p>
@@ -1963,7 +1972,7 @@
           <a:p>
             <a:fld id="{80E38E48-C2A3-4581-BEEE-BDFDC959DF33}" type="datetimeFigureOut">
               <a:rPr lang="ru-RU" smtClean="0"/>
-              <a:t>27.08.2026</a:t>
+              <a:t>30.08.2026</a:t>
             </a:fld>
             <a:endParaRPr lang="ru-RU"/>
           </a:p>
@@ -2058,7 +2067,7 @@
           <a:p>
             <a:fld id="{80E38E48-C2A3-4581-BEEE-BDFDC959DF33}" type="datetimeFigureOut">
               <a:rPr lang="ru-RU" smtClean="0"/>
-              <a:t>27.08.2026</a:t>
+              <a:t>30.08.2026</a:t>
             </a:fld>
             <a:endParaRPr lang="ru-RU"/>
           </a:p>
@@ -2414,7 +2423,7 @@
           <a:p>
             <a:fld id="{80E38E48-C2A3-4581-BEEE-BDFDC959DF33}" type="datetimeFigureOut">
               <a:rPr lang="ru-RU" smtClean="0"/>
-              <a:t>27.08.2026</a:t>
+              <a:t>30.08.2026</a:t>
             </a:fld>
             <a:endParaRPr lang="ru-RU"/>
           </a:p>
@@ -2730,7 +2739,7 @@
           <a:p>
             <a:fld id="{80E38E48-C2A3-4581-BEEE-BDFDC959DF33}" type="datetimeFigureOut">
               <a:rPr lang="ru-RU" smtClean="0"/>
-              <a:t>27.08.2026</a:t>
+              <a:t>30.08.2026</a:t>
             </a:fld>
             <a:endParaRPr lang="ru-RU"/>
           </a:p>
@@ -2963,7 +2972,7 @@
           <a:p>
             <a:fld id="{80E38E48-C2A3-4581-BEEE-BDFDC959DF33}" type="datetimeFigureOut">
               <a:rPr lang="ru-RU" smtClean="0"/>
-              <a:t>27.08.2026</a:t>
+              <a:t>30.08.2026</a:t>
             </a:fld>
             <a:endParaRPr lang="ru-RU"/>
           </a:p>
@@ -3640,7 +3649,6 @@
               <a:rPr lang="ru-RU" dirty="0"/>
               <a:t>Требования разработчика: Абстракция канала</a:t>
             </a:r>
-            <a:endParaRPr lang="ru-RU" dirty="0"/>
           </a:p>
         </p:txBody>
       </p:sp>
@@ -3828,7 +3836,6 @@
               <a:rPr lang="ru-RU" dirty="0"/>
               <a:t>Взгляд оператора: Эксплуатация сети</a:t>
             </a:r>
-            <a:endParaRPr lang="ru-RU" dirty="0"/>
           </a:p>
         </p:txBody>
       </p:sp>
@@ -4033,6 +4040,1505 @@
     <p:extLst>
       <p:ext uri="{BB962C8B-B14F-4D97-AF65-F5344CB8AC3E}">
         <p14:creationId xmlns:p14="http://schemas.microsoft.com/office/powerpoint/2010/main" val="824875538"/>
+      </p:ext>
+    </p:extLst>
+  </p:cSld>
+  <p:clrMapOvr>
+    <a:masterClrMapping/>
+  </p:clrMapOvr>
+</p:sld>
+</file>
+
+<file path=ppt/slides/slide13.xml><?xml version="1.0" encoding="utf-8"?>
+<p:sld xmlns:a="http://schemas.openxmlformats.org/drawingml/2006/main" xmlns:r="http://schemas.openxmlformats.org/officeDocument/2006/relationships" xmlns:p="http://schemas.openxmlformats.org/presentationml/2006/main">
+  <p:cSld>
+    <p:spTree>
+      <p:nvGrpSpPr>
+        <p:cNvPr id="1" name=""/>
+        <p:cNvGrpSpPr/>
+        <p:nvPr/>
+      </p:nvGrpSpPr>
+      <p:grpSpPr>
+        <a:xfrm>
+          <a:off x="0" y="0"/>
+          <a:ext cx="0" cy="0"/>
+          <a:chOff x="0" y="0"/>
+          <a:chExt cx="0" cy="0"/>
+        </a:xfrm>
+      </p:grpSpPr>
+      <p:sp>
+        <p:nvSpPr>
+          <p:cNvPr id="5" name="Заголовок 4"/>
+          <p:cNvSpPr>
+            <a:spLocks noGrp="1"/>
+          </p:cNvSpPr>
+          <p:nvPr>
+            <p:ph type="title"/>
+          </p:nvPr>
+        </p:nvSpPr>
+        <p:spPr>
+          <a:xfrm>
+            <a:off x="657224" y="499533"/>
+            <a:ext cx="10772775" cy="3534378"/>
+          </a:xfrm>
+        </p:spPr>
+        <p:txBody>
+          <a:bodyPr>
+            <a:normAutofit fontScale="90000"/>
+          </a:bodyPr>
+          <a:lstStyle/>
+          <a:p>
+            <a:r>
+              <a:rPr lang="ru-RU" b="1" dirty="0"/>
+              <a:t>В чём главное отличие современных компьютерных сетей от классических сетей узкого назначения (например, старых телефонных или кабельного ТВ)?</a:t>
+            </a:r>
+            <a:endParaRPr lang="ru-RU" dirty="0"/>
+          </a:p>
+        </p:txBody>
+      </p:sp>
+      <p:sp>
+        <p:nvSpPr>
+          <p:cNvPr id="6" name="Объект 5"/>
+          <p:cNvSpPr>
+            <a:spLocks noGrp="1"/>
+          </p:cNvSpPr>
+          <p:nvPr>
+            <p:ph idx="1"/>
+          </p:nvPr>
+        </p:nvSpPr>
+        <p:spPr>
+          <a:xfrm>
+            <a:off x="657224" y="3822895"/>
+            <a:ext cx="10753725" cy="2463605"/>
+          </a:xfrm>
+        </p:spPr>
+        <p:txBody>
+          <a:bodyPr/>
+          <a:lstStyle/>
+          <a:p>
+            <a:r>
+              <a:rPr lang="ru-RU" b="1" dirty="0"/>
+              <a:t>А)</a:t>
+            </a:r>
+            <a:r>
+              <a:rPr lang="ru-RU" dirty="0"/>
+              <a:t> Компьютерные сети работают исключительно без проводов.</a:t>
+            </a:r>
+          </a:p>
+          <a:p>
+            <a:r>
+              <a:rPr lang="ru-RU" b="1" dirty="0"/>
+              <a:t>Б)</a:t>
+            </a:r>
+            <a:r>
+              <a:rPr lang="ru-RU" dirty="0"/>
+              <a:t> Компьютерные сети универсальны и могут передавать множество различных типов данных для любых приложений.</a:t>
+            </a:r>
+          </a:p>
+          <a:p>
+            <a:r>
+              <a:rPr lang="ru-RU" b="1" dirty="0"/>
+              <a:t>В)</a:t>
+            </a:r>
+            <a:r>
+              <a:rPr lang="ru-RU" dirty="0"/>
+              <a:t> В компьютерных сетях каждый компьютер соединён со всеми остальными напрямую отдельным проводом.</a:t>
+            </a:r>
+          </a:p>
+          <a:p>
+            <a:r>
+              <a:rPr lang="ru-RU" b="1" dirty="0"/>
+              <a:t>Г)</a:t>
+            </a:r>
+            <a:r>
+              <a:rPr lang="ru-RU" dirty="0"/>
+              <a:t> Компьютерные сети оптимизированы только под передачу текста.</a:t>
+            </a:r>
+          </a:p>
+          <a:p>
+            <a:endParaRPr lang="ru-RU" dirty="0"/>
+          </a:p>
+        </p:txBody>
+      </p:sp>
+    </p:spTree>
+    <p:extLst>
+      <p:ext uri="{BB962C8B-B14F-4D97-AF65-F5344CB8AC3E}">
+        <p14:creationId xmlns:p14="http://schemas.microsoft.com/office/powerpoint/2010/main" val="3728645955"/>
+      </p:ext>
+    </p:extLst>
+  </p:cSld>
+  <p:clrMapOvr>
+    <a:masterClrMapping/>
+  </p:clrMapOvr>
+</p:sld>
+</file>
+
+<file path=ppt/slides/slide14.xml><?xml version="1.0" encoding="utf-8"?>
+<p:sld xmlns:a="http://schemas.openxmlformats.org/drawingml/2006/main" xmlns:r="http://schemas.openxmlformats.org/officeDocument/2006/relationships" xmlns:p="http://schemas.openxmlformats.org/presentationml/2006/main">
+  <p:cSld>
+    <p:spTree>
+      <p:nvGrpSpPr>
+        <p:cNvPr id="1" name=""/>
+        <p:cNvGrpSpPr/>
+        <p:nvPr/>
+      </p:nvGrpSpPr>
+      <p:grpSpPr>
+        <a:xfrm>
+          <a:off x="0" y="0"/>
+          <a:ext cx="0" cy="0"/>
+          <a:chOff x="0" y="0"/>
+          <a:chExt cx="0" cy="0"/>
+        </a:xfrm>
+      </p:grpSpPr>
+      <p:sp>
+        <p:nvSpPr>
+          <p:cNvPr id="2" name="Заголовок 1"/>
+          <p:cNvSpPr>
+            <a:spLocks noGrp="1"/>
+          </p:cNvSpPr>
+          <p:nvPr>
+            <p:ph type="title"/>
+          </p:nvPr>
+        </p:nvSpPr>
+        <p:spPr>
+          <a:xfrm>
+            <a:off x="657224" y="1194125"/>
+            <a:ext cx="10772775" cy="1658198"/>
+          </a:xfrm>
+        </p:spPr>
+        <p:txBody>
+          <a:bodyPr>
+            <a:normAutofit fontScale="90000"/>
+          </a:bodyPr>
+          <a:lstStyle/>
+          <a:p>
+            <a:r>
+              <a:rPr lang="ru-RU" b="1" dirty="0"/>
+              <a:t>Какой принцип передачи данных используется в подавляющем большинстве современных компьютерных сетей?</a:t>
+            </a:r>
+            <a:endParaRPr lang="ru-RU" dirty="0"/>
+          </a:p>
+        </p:txBody>
+      </p:sp>
+      <p:sp>
+        <p:nvSpPr>
+          <p:cNvPr id="3" name="Объект 2"/>
+          <p:cNvSpPr>
+            <a:spLocks noGrp="1"/>
+          </p:cNvSpPr>
+          <p:nvPr>
+            <p:ph idx="1"/>
+          </p:nvPr>
+        </p:nvSpPr>
+        <p:spPr>
+          <a:xfrm>
+            <a:off x="657224" y="3559126"/>
+            <a:ext cx="10753725" cy="2270174"/>
+          </a:xfrm>
+        </p:spPr>
+        <p:txBody>
+          <a:bodyPr/>
+          <a:lstStyle/>
+          <a:p>
+            <a:r>
+              <a:rPr lang="ru-RU" b="1" dirty="0"/>
+              <a:t>А)</a:t>
+            </a:r>
+            <a:r>
+              <a:rPr lang="ru-RU" dirty="0"/>
+              <a:t> Коммутация каналов (выделение и блокировка всей физической линии на всё время сеанса).</a:t>
+            </a:r>
+          </a:p>
+          <a:p>
+            <a:r>
+              <a:rPr lang="ru-RU" b="1" dirty="0"/>
+              <a:t>Б)</a:t>
+            </a:r>
+            <a:r>
+              <a:rPr lang="ru-RU" dirty="0"/>
+              <a:t> Коммутация пакетов со стратегией «</a:t>
+            </a:r>
+            <a:r>
+              <a:rPr lang="ru-RU" dirty="0" err="1"/>
+              <a:t>store-and-forward</a:t>
+            </a:r>
+            <a:r>
+              <a:rPr lang="ru-RU" dirty="0"/>
+              <a:t>» (сохрани и перешли).</a:t>
+            </a:r>
+          </a:p>
+          <a:p>
+            <a:r>
+              <a:rPr lang="ru-RU" b="1" dirty="0"/>
+              <a:t>В)</a:t>
+            </a:r>
+            <a:r>
+              <a:rPr lang="ru-RU" dirty="0"/>
+              <a:t> Передача единого непрерывного аналогового потока без разбиения.</a:t>
+            </a:r>
+          </a:p>
+          <a:p>
+            <a:r>
+              <a:rPr lang="ru-RU" b="1" dirty="0"/>
+              <a:t>Г)</a:t>
+            </a:r>
+            <a:r>
+              <a:rPr lang="ru-RU" dirty="0"/>
+              <a:t> Прямая трансляция без использования промежуточных узлов.</a:t>
+            </a:r>
+          </a:p>
+          <a:p>
+            <a:endParaRPr lang="ru-RU" dirty="0"/>
+          </a:p>
+        </p:txBody>
+      </p:sp>
+    </p:spTree>
+    <p:extLst>
+      <p:ext uri="{BB962C8B-B14F-4D97-AF65-F5344CB8AC3E}">
+        <p14:creationId xmlns:p14="http://schemas.microsoft.com/office/powerpoint/2010/main" val="824283284"/>
+      </p:ext>
+    </p:extLst>
+  </p:cSld>
+  <p:clrMapOvr>
+    <a:masterClrMapping/>
+  </p:clrMapOvr>
+</p:sld>
+</file>
+
+<file path=ppt/slides/slide15.xml><?xml version="1.0" encoding="utf-8"?>
+<p:sld xmlns:a="http://schemas.openxmlformats.org/drawingml/2006/main" xmlns:r="http://schemas.openxmlformats.org/officeDocument/2006/relationships" xmlns:p="http://schemas.openxmlformats.org/presentationml/2006/main">
+  <p:cSld>
+    <p:spTree>
+      <p:nvGrpSpPr>
+        <p:cNvPr id="1" name=""/>
+        <p:cNvGrpSpPr/>
+        <p:nvPr/>
+      </p:nvGrpSpPr>
+      <p:grpSpPr>
+        <a:xfrm>
+          <a:off x="0" y="0"/>
+          <a:ext cx="0" cy="0"/>
+          <a:chOff x="0" y="0"/>
+          <a:chExt cx="0" cy="0"/>
+        </a:xfrm>
+      </p:grpSpPr>
+      <p:sp>
+        <p:nvSpPr>
+          <p:cNvPr id="2" name="Заголовок 1"/>
+          <p:cNvSpPr>
+            <a:spLocks noGrp="1"/>
+          </p:cNvSpPr>
+          <p:nvPr>
+            <p:ph type="title"/>
+          </p:nvPr>
+        </p:nvSpPr>
+        <p:spPr>
+          <a:xfrm>
+            <a:off x="657224" y="1220503"/>
+            <a:ext cx="10772775" cy="1658198"/>
+          </a:xfrm>
+        </p:spPr>
+        <p:txBody>
+          <a:bodyPr>
+            <a:normAutofit fontScale="90000"/>
+          </a:bodyPr>
+          <a:lstStyle/>
+          <a:p>
+            <a:r>
+              <a:rPr lang="ru-RU" b="1" dirty="0"/>
+              <a:t>Представьте устройство, которое объединяет между собой две или более независимые сети (разные «облака») и пересылает пакеты из одной сети в другую. Как оно называется?</a:t>
+            </a:r>
+            <a:endParaRPr lang="ru-RU" dirty="0"/>
+          </a:p>
+        </p:txBody>
+      </p:sp>
+      <p:sp>
+        <p:nvSpPr>
+          <p:cNvPr id="3" name="Объект 2"/>
+          <p:cNvSpPr>
+            <a:spLocks noGrp="1"/>
+          </p:cNvSpPr>
+          <p:nvPr>
+            <p:ph idx="1"/>
+          </p:nvPr>
+        </p:nvSpPr>
+        <p:spPr>
+          <a:xfrm>
+            <a:off x="657224" y="3963573"/>
+            <a:ext cx="10753725" cy="2032782"/>
+          </a:xfrm>
+        </p:spPr>
+        <p:txBody>
+          <a:bodyPr/>
+          <a:lstStyle/>
+          <a:p>
+            <a:r>
+              <a:rPr lang="ru-RU" b="1" dirty="0"/>
+              <a:t>А)</a:t>
+            </a:r>
+            <a:r>
+              <a:rPr lang="ru-RU" dirty="0"/>
+              <a:t> Хост (оконечный узел)</a:t>
+            </a:r>
+          </a:p>
+          <a:p>
+            <a:r>
+              <a:rPr lang="ru-RU" b="1" dirty="0"/>
+              <a:t>Б)</a:t>
+            </a:r>
+            <a:r>
+              <a:rPr lang="ru-RU" dirty="0"/>
+              <a:t> Маршрутизатор (шлюз)</a:t>
+            </a:r>
+          </a:p>
+          <a:p>
+            <a:r>
+              <a:rPr lang="ru-RU" b="1" dirty="0"/>
+              <a:t>В)</a:t>
+            </a:r>
+            <a:r>
+              <a:rPr lang="ru-RU" dirty="0"/>
+              <a:t> Сетевой кабель</a:t>
+            </a:r>
+          </a:p>
+          <a:p>
+            <a:r>
+              <a:rPr lang="ru-RU" b="1" dirty="0"/>
+              <a:t>Г)</a:t>
+            </a:r>
+            <a:r>
+              <a:rPr lang="ru-RU" dirty="0"/>
+              <a:t> Периферийное устройство</a:t>
+            </a:r>
+          </a:p>
+          <a:p>
+            <a:endParaRPr lang="ru-RU" dirty="0"/>
+          </a:p>
+        </p:txBody>
+      </p:sp>
+    </p:spTree>
+    <p:extLst>
+      <p:ext uri="{BB962C8B-B14F-4D97-AF65-F5344CB8AC3E}">
+        <p14:creationId xmlns:p14="http://schemas.microsoft.com/office/powerpoint/2010/main" val="2809661286"/>
+      </p:ext>
+    </p:extLst>
+  </p:cSld>
+  <p:clrMapOvr>
+    <a:masterClrMapping/>
+  </p:clrMapOvr>
+</p:sld>
+</file>
+
+<file path=ppt/slides/slide16.xml><?xml version="1.0" encoding="utf-8"?>
+<p:sld xmlns:a="http://schemas.openxmlformats.org/drawingml/2006/main" xmlns:r="http://schemas.openxmlformats.org/officeDocument/2006/relationships" xmlns:p="http://schemas.openxmlformats.org/presentationml/2006/main">
+  <p:cSld>
+    <p:spTree>
+      <p:nvGrpSpPr>
+        <p:cNvPr id="1" name=""/>
+        <p:cNvGrpSpPr/>
+        <p:nvPr/>
+      </p:nvGrpSpPr>
+      <p:grpSpPr>
+        <a:xfrm>
+          <a:off x="0" y="0"/>
+          <a:ext cx="0" cy="0"/>
+          <a:chOff x="0" y="0"/>
+          <a:chExt cx="0" cy="0"/>
+        </a:xfrm>
+      </p:grpSpPr>
+      <p:sp>
+        <p:nvSpPr>
+          <p:cNvPr id="2" name="Заголовок 1"/>
+          <p:cNvSpPr>
+            <a:spLocks noGrp="1"/>
+          </p:cNvSpPr>
+          <p:nvPr>
+            <p:ph type="title"/>
+          </p:nvPr>
+        </p:nvSpPr>
+        <p:spPr>
+          <a:xfrm>
+            <a:off x="657224" y="1352387"/>
+            <a:ext cx="10772775" cy="1658198"/>
+          </a:xfrm>
+        </p:spPr>
+        <p:txBody>
+          <a:bodyPr>
+            <a:normAutofit fontScale="90000"/>
+          </a:bodyPr>
+          <a:lstStyle/>
+          <a:p>
+            <a:r>
+              <a:rPr lang="ru-RU" b="1" dirty="0"/>
+              <a:t>Как называется процесс определения промежуточными узлами оптимального пути для пересылки сообщения получателю на основе его сетевого адреса?</a:t>
+            </a:r>
+            <a:endParaRPr lang="ru-RU" dirty="0"/>
+          </a:p>
+        </p:txBody>
+      </p:sp>
+      <p:sp>
+        <p:nvSpPr>
+          <p:cNvPr id="3" name="Объект 2"/>
+          <p:cNvSpPr>
+            <a:spLocks noGrp="1"/>
+          </p:cNvSpPr>
+          <p:nvPr>
+            <p:ph idx="1"/>
+          </p:nvPr>
+        </p:nvSpPr>
+        <p:spPr>
+          <a:xfrm>
+            <a:off x="657224" y="4086665"/>
+            <a:ext cx="10753725" cy="1962443"/>
+          </a:xfrm>
+        </p:spPr>
+        <p:txBody>
+          <a:bodyPr/>
+          <a:lstStyle/>
+          <a:p>
+            <a:r>
+              <a:rPr lang="ru-RU" b="1" dirty="0"/>
+              <a:t>А)</a:t>
+            </a:r>
+            <a:r>
+              <a:rPr lang="ru-RU" dirty="0"/>
+              <a:t> </a:t>
+            </a:r>
+            <a:r>
+              <a:rPr lang="ru-RU" dirty="0" err="1"/>
+              <a:t>Стриминг</a:t>
+            </a:r>
+            <a:endParaRPr lang="ru-RU" dirty="0"/>
+          </a:p>
+          <a:p>
+            <a:r>
+              <a:rPr lang="ru-RU" b="1" dirty="0"/>
+              <a:t>Б)</a:t>
+            </a:r>
+            <a:r>
+              <a:rPr lang="ru-RU" dirty="0"/>
+              <a:t> Буферизация</a:t>
+            </a:r>
+          </a:p>
+          <a:p>
+            <a:r>
+              <a:rPr lang="ru-RU" b="1" dirty="0"/>
+              <a:t>В)</a:t>
+            </a:r>
+            <a:r>
+              <a:rPr lang="ru-RU" dirty="0"/>
+              <a:t> Маршрутизация</a:t>
+            </a:r>
+          </a:p>
+          <a:p>
+            <a:r>
+              <a:rPr lang="ru-RU" b="1" dirty="0"/>
+              <a:t>Г)</a:t>
+            </a:r>
+            <a:r>
+              <a:rPr lang="ru-RU" dirty="0"/>
+              <a:t> Коммутация каналов</a:t>
+            </a:r>
+          </a:p>
+          <a:p>
+            <a:endParaRPr lang="ru-RU" dirty="0"/>
+          </a:p>
+        </p:txBody>
+      </p:sp>
+    </p:spTree>
+    <p:extLst>
+      <p:ext uri="{BB962C8B-B14F-4D97-AF65-F5344CB8AC3E}">
+        <p14:creationId xmlns:p14="http://schemas.microsoft.com/office/powerpoint/2010/main" val="194880721"/>
+      </p:ext>
+    </p:extLst>
+  </p:cSld>
+  <p:clrMapOvr>
+    <a:masterClrMapping/>
+  </p:clrMapOvr>
+</p:sld>
+</file>
+
+<file path=ppt/slides/slide17.xml><?xml version="1.0" encoding="utf-8"?>
+<p:sld xmlns:a="http://schemas.openxmlformats.org/drawingml/2006/main" xmlns:r="http://schemas.openxmlformats.org/officeDocument/2006/relationships" xmlns:p="http://schemas.openxmlformats.org/presentationml/2006/main">
+  <p:cSld>
+    <p:spTree>
+      <p:nvGrpSpPr>
+        <p:cNvPr id="1" name=""/>
+        <p:cNvGrpSpPr/>
+        <p:nvPr/>
+      </p:nvGrpSpPr>
+      <p:grpSpPr>
+        <a:xfrm>
+          <a:off x="0" y="0"/>
+          <a:ext cx="0" cy="0"/>
+          <a:chOff x="0" y="0"/>
+          <a:chExt cx="0" cy="0"/>
+        </a:xfrm>
+      </p:grpSpPr>
+      <p:sp>
+        <p:nvSpPr>
+          <p:cNvPr id="2" name="Заголовок 1"/>
+          <p:cNvSpPr>
+            <a:spLocks noGrp="1"/>
+          </p:cNvSpPr>
+          <p:nvPr>
+            <p:ph type="title"/>
+          </p:nvPr>
+        </p:nvSpPr>
+        <p:spPr>
+          <a:xfrm>
+            <a:off x="657224" y="1071033"/>
+            <a:ext cx="10772775" cy="1658198"/>
+          </a:xfrm>
+        </p:spPr>
+        <p:txBody>
+          <a:bodyPr>
+            <a:normAutofit fontScale="90000"/>
+          </a:bodyPr>
+          <a:lstStyle/>
+          <a:p>
+            <a:r>
+              <a:rPr lang="ru-RU" b="1" dirty="0"/>
+              <a:t>Какое главное архитектурное различие существует между </a:t>
+            </a:r>
+            <a:r>
+              <a:rPr lang="ru-RU" b="1" i="1" dirty="0"/>
+              <a:t>видео по запросу</a:t>
+            </a:r>
+            <a:r>
+              <a:rPr lang="ru-RU" b="1" dirty="0"/>
+              <a:t> (потоковое видео) и </a:t>
+            </a:r>
+            <a:r>
+              <a:rPr lang="ru-RU" b="1" i="1" dirty="0"/>
+              <a:t>видеоконференциями</a:t>
+            </a:r>
+            <a:r>
+              <a:rPr lang="ru-RU" b="1" dirty="0"/>
+              <a:t> (приложения реального времени)?</a:t>
+            </a:r>
+            <a:endParaRPr lang="ru-RU" dirty="0"/>
+          </a:p>
+        </p:txBody>
+      </p:sp>
+      <p:sp>
+        <p:nvSpPr>
+          <p:cNvPr id="3" name="Объект 2"/>
+          <p:cNvSpPr>
+            <a:spLocks noGrp="1"/>
+          </p:cNvSpPr>
+          <p:nvPr>
+            <p:ph idx="1"/>
+          </p:nvPr>
+        </p:nvSpPr>
+        <p:spPr>
+          <a:xfrm>
+            <a:off x="657224" y="3585504"/>
+            <a:ext cx="10753725" cy="2894428"/>
+          </a:xfrm>
+        </p:spPr>
+        <p:txBody>
+          <a:bodyPr/>
+          <a:lstStyle/>
+          <a:p>
+            <a:r>
+              <a:rPr lang="ru-RU" b="1" dirty="0"/>
+              <a:t>А)</a:t>
+            </a:r>
+            <a:r>
+              <a:rPr lang="ru-RU" dirty="0"/>
+              <a:t> Приложения реального времени требуют двунаправленной передачи и крайне чувствительны к задержкам (задержка даже в пару секунд делает разговор невозможным).</a:t>
+            </a:r>
+          </a:p>
+          <a:p>
+            <a:r>
+              <a:rPr lang="ru-RU" b="1" dirty="0"/>
+              <a:t>Б)</a:t>
+            </a:r>
+            <a:r>
+              <a:rPr lang="ru-RU" dirty="0"/>
+              <a:t> Видео по запросу требует обязательной предварительной загрузки всего файла целиком перед просмотром.</a:t>
+            </a:r>
+          </a:p>
+          <a:p>
+            <a:r>
+              <a:rPr lang="ru-RU" b="1" dirty="0"/>
+              <a:t>В)</a:t>
+            </a:r>
+            <a:r>
+              <a:rPr lang="ru-RU" dirty="0"/>
+              <a:t> Видеоконференции передают данные только в одном направлении.</a:t>
+            </a:r>
+          </a:p>
+          <a:p>
+            <a:r>
+              <a:rPr lang="ru-RU" b="1" dirty="0"/>
+              <a:t>Г)</a:t>
+            </a:r>
+            <a:r>
+              <a:rPr lang="ru-RU" dirty="0"/>
+              <a:t> Веб-страницы и видео по запросу работают без сетевых адресов.</a:t>
+            </a:r>
+          </a:p>
+          <a:p>
+            <a:endParaRPr lang="ru-RU" dirty="0"/>
+          </a:p>
+        </p:txBody>
+      </p:sp>
+    </p:spTree>
+    <p:extLst>
+      <p:ext uri="{BB962C8B-B14F-4D97-AF65-F5344CB8AC3E}">
+        <p14:creationId xmlns:p14="http://schemas.microsoft.com/office/powerpoint/2010/main" val="4285183516"/>
+      </p:ext>
+    </p:extLst>
+  </p:cSld>
+  <p:clrMapOvr>
+    <a:masterClrMapping/>
+  </p:clrMapOvr>
+</p:sld>
+</file>
+
+<file path=ppt/slides/slide18.xml><?xml version="1.0" encoding="utf-8"?>
+<p:sld xmlns:a="http://schemas.openxmlformats.org/drawingml/2006/main" xmlns:r="http://schemas.openxmlformats.org/officeDocument/2006/relationships" xmlns:p="http://schemas.openxmlformats.org/presentationml/2006/main">
+  <p:cSld>
+    <p:spTree>
+      <p:nvGrpSpPr>
+        <p:cNvPr id="1" name=""/>
+        <p:cNvGrpSpPr/>
+        <p:nvPr/>
+      </p:nvGrpSpPr>
+      <p:grpSpPr>
+        <a:xfrm>
+          <a:off x="0" y="0"/>
+          <a:ext cx="0" cy="0"/>
+          <a:chOff x="0" y="0"/>
+          <a:chExt cx="0" cy="0"/>
+        </a:xfrm>
+      </p:grpSpPr>
+      <p:sp>
+        <p:nvSpPr>
+          <p:cNvPr id="2" name="Заголовок 1"/>
+          <p:cNvSpPr>
+            <a:spLocks noGrp="1"/>
+          </p:cNvSpPr>
+          <p:nvPr>
+            <p:ph type="title"/>
+          </p:nvPr>
+        </p:nvSpPr>
+        <p:spPr/>
+        <p:txBody>
+          <a:bodyPr/>
+          <a:lstStyle/>
+          <a:p>
+            <a:r>
+              <a:rPr lang="ru-RU" b="1" dirty="0"/>
+              <a:t>Соотнесите заинтересованную группу с её главным фокусом:</a:t>
+            </a:r>
+            <a:endParaRPr lang="ru-RU" dirty="0"/>
+          </a:p>
+        </p:txBody>
+      </p:sp>
+      <p:graphicFrame>
+        <p:nvGraphicFramePr>
+          <p:cNvPr id="4" name="Объект 3"/>
+          <p:cNvGraphicFramePr>
+            <a:graphicFrameLocks noGrp="1"/>
+          </p:cNvGraphicFramePr>
+          <p:nvPr>
+            <p:ph idx="1"/>
+            <p:extLst>
+              <p:ext uri="{D42A27DB-BD31-4B8C-83A1-F6EECF244321}">
+                <p14:modId xmlns:p14="http://schemas.microsoft.com/office/powerpoint/2010/main" val="2733740874"/>
+              </p:ext>
+            </p:extLst>
+          </p:nvPr>
+        </p:nvGraphicFramePr>
+        <p:xfrm>
+          <a:off x="676275" y="2744311"/>
+          <a:ext cx="10753724" cy="2301240"/>
+        </p:xfrm>
+        <a:graphic>
+          <a:graphicData uri="http://schemas.openxmlformats.org/drawingml/2006/table">
+            <a:tbl>
+              <a:tblPr/>
+              <a:tblGrid>
+                <a:gridCol w="5376862">
+                  <a:extLst>
+                    <a:ext uri="{9D8B030D-6E8A-4147-A177-3AD203B41FA5}">
+                      <a16:colId xmlns:a16="http://schemas.microsoft.com/office/drawing/2014/main" val="1156714002"/>
+                    </a:ext>
+                  </a:extLst>
+                </a:gridCol>
+                <a:gridCol w="5376862">
+                  <a:extLst>
+                    <a:ext uri="{9D8B030D-6E8A-4147-A177-3AD203B41FA5}">
+                      <a16:colId xmlns:a16="http://schemas.microsoft.com/office/drawing/2014/main" val="4141271321"/>
+                    </a:ext>
+                  </a:extLst>
+                </a:gridCol>
+              </a:tblGrid>
+              <a:tr h="369570">
+                <a:tc>
+                  <a:txBody>
+                    <a:bodyPr/>
+                    <a:lstStyle/>
+                    <a:p>
+                      <a:pPr algn="l"/>
+                      <a:r>
+                        <a:rPr lang="ru-RU" sz="1800" dirty="0">
+                          <a:effectLst/>
+                        </a:rPr>
+                        <a:t>Заинтересованная группа</a:t>
+                      </a:r>
+                    </a:p>
+                  </a:txBody>
+                  <a:tcPr marL="95250" marR="95250" marT="47625" marB="47625" anchor="ctr">
+                    <a:lnL w="12700" cap="flat" cmpd="sng" algn="ctr">
+                      <a:solidFill>
+                        <a:schemeClr val="tx1"/>
+                      </a:solidFill>
+                      <a:prstDash val="solid"/>
+                      <a:round/>
+                      <a:headEnd type="none" w="med" len="med"/>
+                      <a:tailEnd type="none" w="med" len="med"/>
+                    </a:lnL>
+                    <a:lnR w="12700" cap="flat" cmpd="sng" algn="ctr">
+                      <a:solidFill>
+                        <a:schemeClr val="tx1"/>
+                      </a:solidFill>
+                      <a:prstDash val="solid"/>
+                      <a:round/>
+                      <a:headEnd type="none" w="med" len="med"/>
+                      <a:tailEnd type="none" w="med" len="med"/>
+                    </a:lnR>
+                    <a:lnT w="12700" cap="flat" cmpd="sng" algn="ctr">
+                      <a:solidFill>
+                        <a:schemeClr val="tx1"/>
+                      </a:solidFill>
+                      <a:prstDash val="solid"/>
+                      <a:round/>
+                      <a:headEnd type="none" w="med" len="med"/>
+                      <a:tailEnd type="none" w="med" len="med"/>
+                    </a:lnT>
+                    <a:lnB w="12700" cap="flat" cmpd="sng" algn="ctr">
+                      <a:solidFill>
+                        <a:schemeClr val="tx1"/>
+                      </a:solidFill>
+                      <a:prstDash val="solid"/>
+                      <a:round/>
+                      <a:headEnd type="none" w="med" len="med"/>
+                      <a:tailEnd type="none" w="med" len="med"/>
+                    </a:lnB>
+                  </a:tcPr>
+                </a:tc>
+                <a:tc>
+                  <a:txBody>
+                    <a:bodyPr/>
+                    <a:lstStyle/>
+                    <a:p>
+                      <a:pPr algn="l"/>
+                      <a:r>
+                        <a:rPr lang="ru-RU" sz="1800">
+                          <a:effectLst/>
+                        </a:rPr>
+                        <a:t>Главное требование</a:t>
+                      </a:r>
+                    </a:p>
+                  </a:txBody>
+                  <a:tcPr marL="95250" marR="95250" marT="47625" marB="47625" anchor="ctr">
+                    <a:lnL w="12700" cap="flat" cmpd="sng" algn="ctr">
+                      <a:solidFill>
+                        <a:schemeClr val="tx1"/>
+                      </a:solidFill>
+                      <a:prstDash val="solid"/>
+                      <a:round/>
+                      <a:headEnd type="none" w="med" len="med"/>
+                      <a:tailEnd type="none" w="med" len="med"/>
+                    </a:lnL>
+                    <a:lnR w="12700" cap="flat" cmpd="sng" algn="ctr">
+                      <a:solidFill>
+                        <a:schemeClr val="tx1"/>
+                      </a:solidFill>
+                      <a:prstDash val="solid"/>
+                      <a:round/>
+                      <a:headEnd type="none" w="med" len="med"/>
+                      <a:tailEnd type="none" w="med" len="med"/>
+                    </a:lnR>
+                    <a:lnT w="12700" cap="flat" cmpd="sng" algn="ctr">
+                      <a:solidFill>
+                        <a:schemeClr val="tx1"/>
+                      </a:solidFill>
+                      <a:prstDash val="solid"/>
+                      <a:round/>
+                      <a:headEnd type="none" w="med" len="med"/>
+                      <a:tailEnd type="none" w="med" len="med"/>
+                    </a:lnT>
+                    <a:lnB w="12700" cap="flat" cmpd="sng" algn="ctr">
+                      <a:solidFill>
+                        <a:schemeClr val="tx1"/>
+                      </a:solidFill>
+                      <a:prstDash val="solid"/>
+                      <a:round/>
+                      <a:headEnd type="none" w="med" len="med"/>
+                      <a:tailEnd type="none" w="med" len="med"/>
+                    </a:lnB>
+                  </a:tcPr>
+                </a:tc>
+                <a:extLst>
+                  <a:ext uri="{0D108BD9-81ED-4DB2-BD59-A6C34878D82A}">
+                    <a16:rowId xmlns:a16="http://schemas.microsoft.com/office/drawing/2014/main" val="847096929"/>
+                  </a:ext>
+                </a:extLst>
+              </a:tr>
+              <a:tr h="643890">
+                <a:tc>
+                  <a:txBody>
+                    <a:bodyPr/>
+                    <a:lstStyle/>
+                    <a:p>
+                      <a:pPr algn="l"/>
+                      <a:r>
+                        <a:rPr lang="ru-RU" sz="1800" b="1" dirty="0">
+                          <a:effectLst/>
+                        </a:rPr>
+                        <a:t>1. Конечный пользователь</a:t>
+                      </a:r>
+                      <a:endParaRPr lang="ru-RU" sz="1800" dirty="0">
+                        <a:effectLst/>
+                      </a:endParaRPr>
+                    </a:p>
+                  </a:txBody>
+                  <a:tcPr marL="95250" marR="95250" marT="47625" marB="47625" anchor="ctr">
+                    <a:lnL w="12700" cap="flat" cmpd="sng" algn="ctr">
+                      <a:solidFill>
+                        <a:schemeClr val="tx1"/>
+                      </a:solidFill>
+                      <a:prstDash val="solid"/>
+                      <a:round/>
+                      <a:headEnd type="none" w="med" len="med"/>
+                      <a:tailEnd type="none" w="med" len="med"/>
+                    </a:lnL>
+                    <a:lnR w="12700" cap="flat" cmpd="sng" algn="ctr">
+                      <a:solidFill>
+                        <a:schemeClr val="tx1"/>
+                      </a:solidFill>
+                      <a:prstDash val="solid"/>
+                      <a:round/>
+                      <a:headEnd type="none" w="med" len="med"/>
+                      <a:tailEnd type="none" w="med" len="med"/>
+                    </a:lnR>
+                    <a:lnT w="12700" cap="flat" cmpd="sng" algn="ctr">
+                      <a:solidFill>
+                        <a:schemeClr val="tx1"/>
+                      </a:solidFill>
+                      <a:prstDash val="solid"/>
+                      <a:round/>
+                      <a:headEnd type="none" w="med" len="med"/>
+                      <a:tailEnd type="none" w="med" len="med"/>
+                    </a:lnT>
+                    <a:lnB w="12700" cap="flat" cmpd="sng" algn="ctr">
+                      <a:solidFill>
+                        <a:schemeClr val="tx1"/>
+                      </a:solidFill>
+                      <a:prstDash val="solid"/>
+                      <a:round/>
+                      <a:headEnd type="none" w="med" len="med"/>
+                      <a:tailEnd type="none" w="med" len="med"/>
+                    </a:lnB>
+                  </a:tcPr>
+                </a:tc>
+                <a:tc>
+                  <a:txBody>
+                    <a:bodyPr/>
+                    <a:lstStyle/>
+                    <a:p>
+                      <a:pPr algn="l"/>
+                      <a:r>
+                        <a:rPr lang="ru-RU" sz="1800" b="1">
+                          <a:effectLst/>
+                        </a:rPr>
+                        <a:t>А)</a:t>
+                      </a:r>
+                      <a:r>
+                        <a:rPr lang="ru-RU" sz="1800">
+                          <a:effectLst/>
+                        </a:rPr>
+                        <a:t> Абстракция («канал») и независимость сети от типа приложения</a:t>
+                      </a:r>
+                    </a:p>
+                  </a:txBody>
+                  <a:tcPr marL="95250" marR="95250" marT="47625" marB="47625" anchor="ctr">
+                    <a:lnL w="12700" cap="flat" cmpd="sng" algn="ctr">
+                      <a:solidFill>
+                        <a:schemeClr val="tx1"/>
+                      </a:solidFill>
+                      <a:prstDash val="solid"/>
+                      <a:round/>
+                      <a:headEnd type="none" w="med" len="med"/>
+                      <a:tailEnd type="none" w="med" len="med"/>
+                    </a:lnL>
+                    <a:lnR w="12700" cap="flat" cmpd="sng" algn="ctr">
+                      <a:solidFill>
+                        <a:schemeClr val="tx1"/>
+                      </a:solidFill>
+                      <a:prstDash val="solid"/>
+                      <a:round/>
+                      <a:headEnd type="none" w="med" len="med"/>
+                      <a:tailEnd type="none" w="med" len="med"/>
+                    </a:lnR>
+                    <a:lnT w="12700" cap="flat" cmpd="sng" algn="ctr">
+                      <a:solidFill>
+                        <a:schemeClr val="tx1"/>
+                      </a:solidFill>
+                      <a:prstDash val="solid"/>
+                      <a:round/>
+                      <a:headEnd type="none" w="med" len="med"/>
+                      <a:tailEnd type="none" w="med" len="med"/>
+                    </a:lnT>
+                    <a:lnB w="12700" cap="flat" cmpd="sng" algn="ctr">
+                      <a:solidFill>
+                        <a:schemeClr val="tx1"/>
+                      </a:solidFill>
+                      <a:prstDash val="solid"/>
+                      <a:round/>
+                      <a:headEnd type="none" w="med" len="med"/>
+                      <a:tailEnd type="none" w="med" len="med"/>
+                    </a:lnB>
+                  </a:tcPr>
+                </a:tc>
+                <a:extLst>
+                  <a:ext uri="{0D108BD9-81ED-4DB2-BD59-A6C34878D82A}">
+                    <a16:rowId xmlns:a16="http://schemas.microsoft.com/office/drawing/2014/main" val="2978935504"/>
+                  </a:ext>
+                </a:extLst>
+              </a:tr>
+              <a:tr h="643890">
+                <a:tc>
+                  <a:txBody>
+                    <a:bodyPr/>
+                    <a:lstStyle/>
+                    <a:p>
+                      <a:pPr algn="l"/>
+                      <a:r>
+                        <a:rPr lang="ru-RU" sz="1800" b="1" dirty="0">
+                          <a:effectLst/>
+                        </a:rPr>
+                        <a:t>2. Разработчик приложений</a:t>
+                      </a:r>
+                      <a:endParaRPr lang="ru-RU" sz="1800" dirty="0">
+                        <a:effectLst/>
+                      </a:endParaRPr>
+                    </a:p>
+                  </a:txBody>
+                  <a:tcPr marL="95250" marR="95250" marT="47625" marB="47625" anchor="ctr">
+                    <a:lnL w="12700" cap="flat" cmpd="sng" algn="ctr">
+                      <a:solidFill>
+                        <a:schemeClr val="tx1"/>
+                      </a:solidFill>
+                      <a:prstDash val="solid"/>
+                      <a:round/>
+                      <a:headEnd type="none" w="med" len="med"/>
+                      <a:tailEnd type="none" w="med" len="med"/>
+                    </a:lnL>
+                    <a:lnR w="12700" cap="flat" cmpd="sng" algn="ctr">
+                      <a:solidFill>
+                        <a:schemeClr val="tx1"/>
+                      </a:solidFill>
+                      <a:prstDash val="solid"/>
+                      <a:round/>
+                      <a:headEnd type="none" w="med" len="med"/>
+                      <a:tailEnd type="none" w="med" len="med"/>
+                    </a:lnR>
+                    <a:lnT w="12700" cap="flat" cmpd="sng" algn="ctr">
+                      <a:solidFill>
+                        <a:schemeClr val="tx1"/>
+                      </a:solidFill>
+                      <a:prstDash val="solid"/>
+                      <a:round/>
+                      <a:headEnd type="none" w="med" len="med"/>
+                      <a:tailEnd type="none" w="med" len="med"/>
+                    </a:lnT>
+                    <a:lnB w="12700" cap="flat" cmpd="sng" algn="ctr">
+                      <a:solidFill>
+                        <a:schemeClr val="tx1"/>
+                      </a:solidFill>
+                      <a:prstDash val="solid"/>
+                      <a:round/>
+                      <a:headEnd type="none" w="med" len="med"/>
+                      <a:tailEnd type="none" w="med" len="med"/>
+                    </a:lnB>
+                  </a:tcPr>
+                </a:tc>
+                <a:tc>
+                  <a:txBody>
+                    <a:bodyPr/>
+                    <a:lstStyle/>
+                    <a:p>
+                      <a:pPr algn="l"/>
+                      <a:r>
+                        <a:rPr lang="ru-RU" sz="1800" b="1" dirty="0">
+                          <a:effectLst/>
+                        </a:rPr>
+                        <a:t>Б)</a:t>
+                      </a:r>
+                      <a:r>
+                        <a:rPr lang="ru-RU" sz="1800" dirty="0">
+                          <a:effectLst/>
+                        </a:rPr>
+                        <a:t> Масштабируемость, простота мониторинга и безопасность</a:t>
+                      </a:r>
+                    </a:p>
+                  </a:txBody>
+                  <a:tcPr marL="95250" marR="95250" marT="47625" marB="47625" anchor="ctr">
+                    <a:lnL w="12700" cap="flat" cmpd="sng" algn="ctr">
+                      <a:solidFill>
+                        <a:schemeClr val="tx1"/>
+                      </a:solidFill>
+                      <a:prstDash val="solid"/>
+                      <a:round/>
+                      <a:headEnd type="none" w="med" len="med"/>
+                      <a:tailEnd type="none" w="med" len="med"/>
+                    </a:lnL>
+                    <a:lnR w="12700" cap="flat" cmpd="sng" algn="ctr">
+                      <a:solidFill>
+                        <a:schemeClr val="tx1"/>
+                      </a:solidFill>
+                      <a:prstDash val="solid"/>
+                      <a:round/>
+                      <a:headEnd type="none" w="med" len="med"/>
+                      <a:tailEnd type="none" w="med" len="med"/>
+                    </a:lnR>
+                    <a:lnT w="12700" cap="flat" cmpd="sng" algn="ctr">
+                      <a:solidFill>
+                        <a:schemeClr val="tx1"/>
+                      </a:solidFill>
+                      <a:prstDash val="solid"/>
+                      <a:round/>
+                      <a:headEnd type="none" w="med" len="med"/>
+                      <a:tailEnd type="none" w="med" len="med"/>
+                    </a:lnT>
+                    <a:lnB w="12700" cap="flat" cmpd="sng" algn="ctr">
+                      <a:solidFill>
+                        <a:schemeClr val="tx1"/>
+                      </a:solidFill>
+                      <a:prstDash val="solid"/>
+                      <a:round/>
+                      <a:headEnd type="none" w="med" len="med"/>
+                      <a:tailEnd type="none" w="med" len="med"/>
+                    </a:lnB>
+                  </a:tcPr>
+                </a:tc>
+                <a:extLst>
+                  <a:ext uri="{0D108BD9-81ED-4DB2-BD59-A6C34878D82A}">
+                    <a16:rowId xmlns:a16="http://schemas.microsoft.com/office/drawing/2014/main" val="3236904046"/>
+                  </a:ext>
+                </a:extLst>
+              </a:tr>
+              <a:tr h="643890">
+                <a:tc>
+                  <a:txBody>
+                    <a:bodyPr/>
+                    <a:lstStyle/>
+                    <a:p>
+                      <a:pPr algn="l"/>
+                      <a:r>
+                        <a:rPr lang="ru-RU" sz="1800" b="1">
+                          <a:effectLst/>
+                        </a:rPr>
+                        <a:t>3. Оператор сети</a:t>
+                      </a:r>
+                      <a:endParaRPr lang="ru-RU" sz="1800">
+                        <a:effectLst/>
+                      </a:endParaRPr>
+                    </a:p>
+                  </a:txBody>
+                  <a:tcPr marL="95250" marR="95250" marT="47625" marB="47625" anchor="ctr">
+                    <a:lnL w="12700" cap="flat" cmpd="sng" algn="ctr">
+                      <a:solidFill>
+                        <a:schemeClr val="tx1"/>
+                      </a:solidFill>
+                      <a:prstDash val="solid"/>
+                      <a:round/>
+                      <a:headEnd type="none" w="med" len="med"/>
+                      <a:tailEnd type="none" w="med" len="med"/>
+                    </a:lnL>
+                    <a:lnR w="12700" cap="flat" cmpd="sng" algn="ctr">
+                      <a:solidFill>
+                        <a:schemeClr val="tx1"/>
+                      </a:solidFill>
+                      <a:prstDash val="solid"/>
+                      <a:round/>
+                      <a:headEnd type="none" w="med" len="med"/>
+                      <a:tailEnd type="none" w="med" len="med"/>
+                    </a:lnR>
+                    <a:lnT w="12700" cap="flat" cmpd="sng" algn="ctr">
+                      <a:solidFill>
+                        <a:schemeClr val="tx1"/>
+                      </a:solidFill>
+                      <a:prstDash val="solid"/>
+                      <a:round/>
+                      <a:headEnd type="none" w="med" len="med"/>
+                      <a:tailEnd type="none" w="med" len="med"/>
+                    </a:lnT>
+                    <a:lnB w="12700" cap="flat" cmpd="sng" algn="ctr">
+                      <a:solidFill>
+                        <a:schemeClr val="tx1"/>
+                      </a:solidFill>
+                      <a:prstDash val="solid"/>
+                      <a:round/>
+                      <a:headEnd type="none" w="med" len="med"/>
+                      <a:tailEnd type="none" w="med" len="med"/>
+                    </a:lnB>
+                  </a:tcPr>
+                </a:tc>
+                <a:tc>
+                  <a:txBody>
+                    <a:bodyPr/>
+                    <a:lstStyle/>
+                    <a:p>
+                      <a:pPr algn="l"/>
+                      <a:r>
+                        <a:rPr lang="ru-RU" sz="1800" b="1" dirty="0">
+                          <a:effectLst/>
+                        </a:rPr>
+                        <a:t>В)</a:t>
+                      </a:r>
+                      <a:r>
+                        <a:rPr lang="ru-RU" sz="1800" dirty="0">
+                          <a:effectLst/>
+                        </a:rPr>
+                        <a:t> Высокая скорость (</a:t>
+                      </a:r>
+                      <a:r>
+                        <a:rPr lang="ru-RU" sz="1800" dirty="0" err="1">
+                          <a:effectLst/>
+                        </a:rPr>
+                        <a:t>Bandwidth</a:t>
+                      </a:r>
+                      <a:r>
+                        <a:rPr lang="ru-RU" sz="1800" dirty="0">
+                          <a:effectLst/>
+                        </a:rPr>
+                        <a:t>), минимальная задержка (</a:t>
+                      </a:r>
+                      <a:r>
+                        <a:rPr lang="ru-RU" sz="1800" dirty="0" err="1">
+                          <a:effectLst/>
+                        </a:rPr>
+                        <a:t>Latency</a:t>
+                      </a:r>
+                      <a:r>
+                        <a:rPr lang="ru-RU" sz="1800" dirty="0">
+                          <a:effectLst/>
+                        </a:rPr>
+                        <a:t>) и низкая цена</a:t>
+                      </a:r>
+                    </a:p>
+                  </a:txBody>
+                  <a:tcPr marL="95250" marR="95250" marT="47625" marB="47625" anchor="ctr">
+                    <a:lnL w="12700" cap="flat" cmpd="sng" algn="ctr">
+                      <a:solidFill>
+                        <a:schemeClr val="tx1"/>
+                      </a:solidFill>
+                      <a:prstDash val="solid"/>
+                      <a:round/>
+                      <a:headEnd type="none" w="med" len="med"/>
+                      <a:tailEnd type="none" w="med" len="med"/>
+                    </a:lnL>
+                    <a:lnR w="12700" cap="flat" cmpd="sng" algn="ctr">
+                      <a:solidFill>
+                        <a:schemeClr val="tx1"/>
+                      </a:solidFill>
+                      <a:prstDash val="solid"/>
+                      <a:round/>
+                      <a:headEnd type="none" w="med" len="med"/>
+                      <a:tailEnd type="none" w="med" len="med"/>
+                    </a:lnR>
+                    <a:lnT w="12700" cap="flat" cmpd="sng" algn="ctr">
+                      <a:solidFill>
+                        <a:schemeClr val="tx1"/>
+                      </a:solidFill>
+                      <a:prstDash val="solid"/>
+                      <a:round/>
+                      <a:headEnd type="none" w="med" len="med"/>
+                      <a:tailEnd type="none" w="med" len="med"/>
+                    </a:lnT>
+                    <a:lnB w="12700" cap="flat" cmpd="sng" algn="ctr">
+                      <a:solidFill>
+                        <a:schemeClr val="tx1"/>
+                      </a:solidFill>
+                      <a:prstDash val="solid"/>
+                      <a:round/>
+                      <a:headEnd type="none" w="med" len="med"/>
+                      <a:tailEnd type="none" w="med" len="med"/>
+                    </a:lnB>
+                  </a:tcPr>
+                </a:tc>
+                <a:extLst>
+                  <a:ext uri="{0D108BD9-81ED-4DB2-BD59-A6C34878D82A}">
+                    <a16:rowId xmlns:a16="http://schemas.microsoft.com/office/drawing/2014/main" val="4027902933"/>
+                  </a:ext>
+                </a:extLst>
+              </a:tr>
+            </a:tbl>
+          </a:graphicData>
+        </a:graphic>
+      </p:graphicFrame>
+      <p:sp>
+        <p:nvSpPr>
+          <p:cNvPr id="5" name="Rectangle 1"/>
+          <p:cNvSpPr>
+            <a:spLocks noChangeArrowheads="1"/>
+          </p:cNvSpPr>
+          <p:nvPr/>
+        </p:nvSpPr>
+        <p:spPr bwMode="auto">
+          <a:xfrm>
+            <a:off x="0" y="0"/>
+            <a:ext cx="12192000" cy="0"/>
+          </a:xfrm>
+          <a:prstGeom prst="rect">
+            <a:avLst/>
+          </a:prstGeom>
+          <a:noFill/>
+          <a:ln>
+            <a:noFill/>
+          </a:ln>
+          <a:effectLst/>
+          <a:extLst>
+            <a:ext uri="{909E8E84-426E-40DD-AFC4-6F175D3DCCD1}">
+              <a14:hiddenFill xmlns:a14="http://schemas.microsoft.com/office/drawing/2010/main">
+                <a:solidFill>
+                  <a:schemeClr val="accent1"/>
+                </a:solidFill>
+              </a14:hiddenFill>
+            </a:ext>
+            <a:ext uri="{91240B29-F687-4F45-9708-019B960494DF}">
+              <a14:hiddenLine xmlns:a14="http://schemas.microsoft.com/office/drawing/2010/main" w="9525">
+                <a:solidFill>
+                  <a:schemeClr val="tx1"/>
+                </a:solidFill>
+                <a:miter lim="800000"/>
+                <a:headEnd/>
+                <a:tailEnd/>
+              </a14:hiddenLine>
+            </a:ext>
+            <a:ext uri="{AF507438-7753-43E0-B8FC-AC1667EBCBE1}">
+              <a14:hiddenEffects xmlns:a14="http://schemas.microsoft.com/office/drawing/2010/main">
+                <a:effectLst>
+                  <a:outerShdw dist="35921" dir="2700000" algn="ctr" rotWithShape="0">
+                    <a:schemeClr val="bg2"/>
+                  </a:outerShdw>
+                </a:effectLst>
+              </a14:hiddenEffects>
+            </a:ext>
+          </a:extLst>
+        </p:spPr>
+        <p:txBody>
+          <a:bodyPr vert="horz" wrap="none" lIns="91440" tIns="45720" rIns="91440" bIns="45720" numCol="1" anchor="ctr" anchorCtr="0" compatLnSpc="1">
+            <a:prstTxWarp prst="textNoShape">
+              <a:avLst/>
+            </a:prstTxWarp>
+            <a:spAutoFit/>
+          </a:bodyPr>
+          <a:lstStyle/>
+          <a:p>
+            <a:pPr marL="0" marR="0" lvl="0" indent="0" algn="l" defTabSz="914400" rtl="0" eaLnBrk="0" fontAlgn="base" latinLnBrk="0" hangingPunct="0">
+              <a:lnSpc>
+                <a:spcPct val="100000"/>
+              </a:lnSpc>
+              <a:spcBef>
+                <a:spcPct val="0"/>
+              </a:spcBef>
+              <a:spcAft>
+                <a:spcPct val="0"/>
+              </a:spcAft>
+              <a:buClrTx/>
+              <a:buSzTx/>
+              <a:buFontTx/>
+              <a:buNone/>
+              <a:tabLst/>
+            </a:pPr>
+            <a:r>
+              <a:rPr kumimoji="0" lang="ru-RU" altLang="ru-RU" sz="1800" b="0" i="0" u="none" strike="noStrike" cap="none" normalizeH="0" baseline="0" smtClean="0">
+                <a:ln>
+                  <a:noFill/>
+                </a:ln>
+                <a:solidFill>
+                  <a:schemeClr val="tx1"/>
+                </a:solidFill>
+                <a:effectLst/>
+                <a:latin typeface="Arial" panose="020B0604020202020204" pitchFamily="34" charset="0"/>
+              </a:rPr>
+              <a:t/>
+            </a:r>
+            <a:br>
+              <a:rPr kumimoji="0" lang="ru-RU" altLang="ru-RU" sz="1800" b="0" i="0" u="none" strike="noStrike" cap="none" normalizeH="0" baseline="0" smtClean="0">
+                <a:ln>
+                  <a:noFill/>
+                </a:ln>
+                <a:solidFill>
+                  <a:schemeClr val="tx1"/>
+                </a:solidFill>
+                <a:effectLst/>
+                <a:latin typeface="Arial" panose="020B0604020202020204" pitchFamily="34" charset="0"/>
+              </a:rPr>
+            </a:br>
+            <a:endParaRPr kumimoji="0" lang="ru-RU" altLang="ru-RU" sz="1800" b="0" i="0" u="none" strike="noStrike" cap="none" normalizeH="0" baseline="0" smtClean="0">
+              <a:ln>
+                <a:noFill/>
+              </a:ln>
+              <a:solidFill>
+                <a:schemeClr val="tx1"/>
+              </a:solidFill>
+              <a:effectLst/>
+              <a:latin typeface="Arial" panose="020B0604020202020204" pitchFamily="34" charset="0"/>
+            </a:endParaRPr>
+          </a:p>
+        </p:txBody>
+      </p:sp>
+    </p:spTree>
+    <p:extLst>
+      <p:ext uri="{BB962C8B-B14F-4D97-AF65-F5344CB8AC3E}">
+        <p14:creationId xmlns:p14="http://schemas.microsoft.com/office/powerpoint/2010/main" val="2430004037"/>
+      </p:ext>
+    </p:extLst>
+  </p:cSld>
+  <p:clrMapOvr>
+    <a:masterClrMapping/>
+  </p:clrMapOvr>
+</p:sld>
+</file>
+
+<file path=ppt/slides/slide19.xml><?xml version="1.0" encoding="utf-8"?>
+<p:sld xmlns:a="http://schemas.openxmlformats.org/drawingml/2006/main" xmlns:r="http://schemas.openxmlformats.org/officeDocument/2006/relationships" xmlns:p="http://schemas.openxmlformats.org/presentationml/2006/main">
+  <p:cSld>
+    <p:spTree>
+      <p:nvGrpSpPr>
+        <p:cNvPr id="1" name=""/>
+        <p:cNvGrpSpPr/>
+        <p:nvPr/>
+      </p:nvGrpSpPr>
+      <p:grpSpPr>
+        <a:xfrm>
+          <a:off x="0" y="0"/>
+          <a:ext cx="0" cy="0"/>
+          <a:chOff x="0" y="0"/>
+          <a:chExt cx="0" cy="0"/>
+        </a:xfrm>
+      </p:grpSpPr>
+      <p:sp>
+        <p:nvSpPr>
+          <p:cNvPr id="2" name="Заголовок 1"/>
+          <p:cNvSpPr>
+            <a:spLocks noGrp="1"/>
+          </p:cNvSpPr>
+          <p:nvPr>
+            <p:ph type="title"/>
+          </p:nvPr>
+        </p:nvSpPr>
+        <p:spPr/>
+        <p:txBody>
+          <a:bodyPr/>
+          <a:lstStyle/>
+          <a:p>
+            <a:r>
+              <a:rPr lang="ru-RU" i="1" dirty="0"/>
+              <a:t>Н</a:t>
+            </a:r>
+            <a:r>
+              <a:rPr lang="ru-RU" i="1" dirty="0" smtClean="0"/>
+              <a:t>айдите </a:t>
+            </a:r>
+            <a:r>
+              <a:rPr lang="ru-RU" i="1" dirty="0"/>
+              <a:t>ошибку в определениях двух ключевых метрик.</a:t>
+            </a:r>
+            <a:endParaRPr lang="ru-RU" dirty="0"/>
+          </a:p>
+        </p:txBody>
+      </p:sp>
+      <p:sp>
+        <p:nvSpPr>
+          <p:cNvPr id="3" name="Объект 2"/>
+          <p:cNvSpPr>
+            <a:spLocks noGrp="1"/>
+          </p:cNvSpPr>
+          <p:nvPr>
+            <p:ph idx="1"/>
+          </p:nvPr>
+        </p:nvSpPr>
+        <p:spPr>
+          <a:xfrm>
+            <a:off x="657224" y="3091816"/>
+            <a:ext cx="10753725" cy="2315454"/>
+          </a:xfrm>
+        </p:spPr>
+        <p:txBody>
+          <a:bodyPr/>
+          <a:lstStyle/>
+          <a:p>
+            <a:r>
+              <a:rPr lang="ru-RU" b="1" dirty="0"/>
+              <a:t>Определение А:</a:t>
+            </a:r>
+            <a:r>
+              <a:rPr lang="ru-RU" dirty="0"/>
+              <a:t> </a:t>
+            </a:r>
+            <a:r>
+              <a:rPr lang="ru-RU" i="1" dirty="0"/>
+              <a:t>«Задержка (</a:t>
+            </a:r>
+            <a:r>
+              <a:rPr lang="ru-RU" i="1" dirty="0" err="1"/>
+              <a:t>Latency</a:t>
+            </a:r>
+            <a:r>
+              <a:rPr lang="ru-RU" i="1" dirty="0"/>
+              <a:t>) — это объем данных, передаваемый по сети за одну секунду, измеряется в Мбит/с</a:t>
+            </a:r>
+            <a:r>
+              <a:rPr lang="ru-RU" i="1" dirty="0" smtClean="0"/>
+              <a:t>».</a:t>
+            </a:r>
+          </a:p>
+          <a:p>
+            <a:r>
+              <a:rPr lang="ru-RU" dirty="0"/>
+              <a:t/>
+            </a:r>
+            <a:br>
+              <a:rPr lang="ru-RU" dirty="0"/>
+            </a:br>
+            <a:r>
+              <a:rPr lang="ru-RU" b="1" dirty="0"/>
+              <a:t>Определение Б:</a:t>
+            </a:r>
+            <a:r>
+              <a:rPr lang="ru-RU" dirty="0"/>
+              <a:t> </a:t>
+            </a:r>
+            <a:r>
+              <a:rPr lang="ru-RU" i="1" dirty="0"/>
+              <a:t>«Пропускная способность (</a:t>
+            </a:r>
+            <a:r>
+              <a:rPr lang="ru-RU" i="1" dirty="0" err="1"/>
+              <a:t>Bandwidth</a:t>
+            </a:r>
+            <a:r>
+              <a:rPr lang="ru-RU" i="1" dirty="0"/>
+              <a:t>) — это время в миллисекундах, за которое один бит доходит от отправителя к получателю».</a:t>
+            </a:r>
+            <a:endParaRPr lang="ru-RU" dirty="0"/>
+          </a:p>
+        </p:txBody>
+      </p:sp>
+    </p:spTree>
+    <p:extLst>
+      <p:ext uri="{BB962C8B-B14F-4D97-AF65-F5344CB8AC3E}">
+        <p14:creationId xmlns:p14="http://schemas.microsoft.com/office/powerpoint/2010/main" val="721724635"/>
       </p:ext>
     </p:extLst>
   </p:cSld>
@@ -4170,6 +5676,229 @@
     <p:extLst>
       <p:ext uri="{BB962C8B-B14F-4D97-AF65-F5344CB8AC3E}">
         <p14:creationId xmlns:p14="http://schemas.microsoft.com/office/powerpoint/2010/main" val="1750085207"/>
+      </p:ext>
+    </p:extLst>
+  </p:cSld>
+  <p:clrMapOvr>
+    <a:masterClrMapping/>
+  </p:clrMapOvr>
+</p:sld>
+</file>
+
+<file path=ppt/slides/slide20.xml><?xml version="1.0" encoding="utf-8"?>
+<p:sld xmlns:a="http://schemas.openxmlformats.org/drawingml/2006/main" xmlns:r="http://schemas.openxmlformats.org/officeDocument/2006/relationships" xmlns:p="http://schemas.openxmlformats.org/presentationml/2006/main">
+  <p:cSld>
+    <p:spTree>
+      <p:nvGrpSpPr>
+        <p:cNvPr id="1" name=""/>
+        <p:cNvGrpSpPr/>
+        <p:nvPr/>
+      </p:nvGrpSpPr>
+      <p:grpSpPr>
+        <a:xfrm>
+          <a:off x="0" y="0"/>
+          <a:ext cx="0" cy="0"/>
+          <a:chOff x="0" y="0"/>
+          <a:chExt cx="0" cy="0"/>
+        </a:xfrm>
+      </p:grpSpPr>
+      <p:sp>
+        <p:nvSpPr>
+          <p:cNvPr id="2" name="Заголовок 1"/>
+          <p:cNvSpPr>
+            <a:spLocks noGrp="1"/>
+          </p:cNvSpPr>
+          <p:nvPr>
+            <p:ph type="title"/>
+          </p:nvPr>
+        </p:nvSpPr>
+        <p:spPr>
+          <a:xfrm>
+            <a:off x="676656" y="1053448"/>
+            <a:ext cx="10772775" cy="1658198"/>
+          </a:xfrm>
+        </p:spPr>
+        <p:txBody>
+          <a:bodyPr>
+            <a:normAutofit fontScale="90000"/>
+          </a:bodyPr>
+          <a:lstStyle/>
+          <a:p>
+            <a:r>
+              <a:rPr lang="ru-RU" dirty="0"/>
+              <a:t>Разработчик создаёт два разных сервиса. Какой тип абстракции канала (</a:t>
+            </a:r>
+            <a:r>
+              <a:rPr lang="ru-RU" b="1" dirty="0"/>
+              <a:t>«Запрос — ответ»</a:t>
+            </a:r>
+            <a:r>
+              <a:rPr lang="ru-RU" dirty="0"/>
+              <a:t> или </a:t>
+            </a:r>
+            <a:r>
+              <a:rPr lang="ru-RU" b="1" dirty="0"/>
+              <a:t>«Потоковый канал»</a:t>
+            </a:r>
+            <a:r>
+              <a:rPr lang="ru-RU" dirty="0"/>
+              <a:t>) лучше подходит для каждого случая?</a:t>
+            </a:r>
+            <a:endParaRPr lang="ru-RU" dirty="0"/>
+          </a:p>
+        </p:txBody>
+      </p:sp>
+      <p:sp>
+        <p:nvSpPr>
+          <p:cNvPr id="3" name="Объект 2"/>
+          <p:cNvSpPr>
+            <a:spLocks noGrp="1"/>
+          </p:cNvSpPr>
+          <p:nvPr>
+            <p:ph idx="1"/>
+          </p:nvPr>
+        </p:nvSpPr>
+        <p:spPr>
+          <a:xfrm>
+            <a:off x="676656" y="3822896"/>
+            <a:ext cx="10753725" cy="1188720"/>
+          </a:xfrm>
+        </p:spPr>
+        <p:txBody>
+          <a:bodyPr>
+            <a:normAutofit lnSpcReduction="10000"/>
+          </a:bodyPr>
+          <a:lstStyle/>
+          <a:p>
+            <a:pPr marL="457200" indent="-457200">
+              <a:buFont typeface="+mj-lt"/>
+              <a:buAutoNum type="arabicPeriod"/>
+            </a:pPr>
+            <a:r>
+              <a:rPr lang="ru-RU" b="1" dirty="0"/>
+              <a:t>Сервис онлайн-банкинга:</a:t>
+            </a:r>
+            <a:r>
+              <a:rPr lang="ru-RU" dirty="0"/>
+              <a:t> проверка баланса по карте и подтверждение перевода.</a:t>
+            </a:r>
+          </a:p>
+          <a:p>
+            <a:pPr marL="457200" indent="-457200">
+              <a:buFont typeface="+mj-lt"/>
+              <a:buAutoNum type="arabicPeriod"/>
+            </a:pPr>
+            <a:r>
+              <a:rPr lang="ru-RU" b="1" dirty="0"/>
+              <a:t>Сервис видеонаблюдения:</a:t>
+            </a:r>
+            <a:r>
+              <a:rPr lang="ru-RU" dirty="0"/>
+              <a:t> передача живого видео с камеры на пульт охраны.</a:t>
+            </a:r>
+          </a:p>
+          <a:p>
+            <a:endParaRPr lang="ru-RU" dirty="0"/>
+          </a:p>
+        </p:txBody>
+      </p:sp>
+    </p:spTree>
+    <p:extLst>
+      <p:ext uri="{BB962C8B-B14F-4D97-AF65-F5344CB8AC3E}">
+        <p14:creationId xmlns:p14="http://schemas.microsoft.com/office/powerpoint/2010/main" val="2165218453"/>
+      </p:ext>
+    </p:extLst>
+  </p:cSld>
+  <p:clrMapOvr>
+    <a:masterClrMapping/>
+  </p:clrMapOvr>
+</p:sld>
+</file>
+
+<file path=ppt/slides/slide21.xml><?xml version="1.0" encoding="utf-8"?>
+<p:sld xmlns:a="http://schemas.openxmlformats.org/drawingml/2006/main" xmlns:r="http://schemas.openxmlformats.org/officeDocument/2006/relationships" xmlns:p="http://schemas.openxmlformats.org/presentationml/2006/main">
+  <p:cSld>
+    <p:spTree>
+      <p:nvGrpSpPr>
+        <p:cNvPr id="1" name=""/>
+        <p:cNvGrpSpPr/>
+        <p:nvPr/>
+      </p:nvGrpSpPr>
+      <p:grpSpPr>
+        <a:xfrm>
+          <a:off x="0" y="0"/>
+          <a:ext cx="0" cy="0"/>
+          <a:chOff x="0" y="0"/>
+          <a:chExt cx="0" cy="0"/>
+        </a:xfrm>
+      </p:grpSpPr>
+      <p:sp>
+        <p:nvSpPr>
+          <p:cNvPr id="2" name="Заголовок 1"/>
+          <p:cNvSpPr>
+            <a:spLocks noGrp="1"/>
+          </p:cNvSpPr>
+          <p:nvPr>
+            <p:ph type="title"/>
+          </p:nvPr>
+        </p:nvSpPr>
+        <p:spPr/>
+        <p:txBody>
+          <a:bodyPr/>
+          <a:lstStyle/>
+          <a:p>
+            <a:r>
+              <a:rPr lang="ru-RU" b="1" dirty="0"/>
+              <a:t>Правда или Миф</a:t>
+            </a:r>
+            <a:r>
+              <a:rPr lang="ru-RU" b="1" dirty="0" smtClean="0"/>
+              <a:t>?</a:t>
+            </a:r>
+            <a:endParaRPr lang="ru-RU" dirty="0"/>
+          </a:p>
+        </p:txBody>
+      </p:sp>
+      <p:sp>
+        <p:nvSpPr>
+          <p:cNvPr id="3" name="Объект 2"/>
+          <p:cNvSpPr>
+            <a:spLocks noGrp="1"/>
+          </p:cNvSpPr>
+          <p:nvPr>
+            <p:ph idx="1"/>
+          </p:nvPr>
+        </p:nvSpPr>
+        <p:spPr>
+          <a:xfrm>
+            <a:off x="657224" y="3321734"/>
+            <a:ext cx="10753725" cy="1628335"/>
+          </a:xfrm>
+        </p:spPr>
+        <p:txBody>
+          <a:bodyPr/>
+          <a:lstStyle/>
+          <a:p>
+            <a:r>
+              <a:rPr lang="ru-RU" i="1" dirty="0"/>
+              <a:t>«Чтобы сеть была максимально гибкой и универсальной, маршрутизаторы внутри сети должны детально знать особенности каждого приложения (например, понимать правила игры в сетевой </a:t>
+            </a:r>
+            <a:r>
+              <a:rPr lang="ru-RU" i="1" dirty="0" err="1"/>
+              <a:t>шутер</a:t>
+            </a:r>
+            <a:r>
+              <a:rPr lang="ru-RU" i="1" dirty="0"/>
+              <a:t> или структуру веб-страницы).»</a:t>
+            </a:r>
+            <a:endParaRPr lang="ru-RU" dirty="0"/>
+          </a:p>
+        </p:txBody>
+      </p:sp>
+    </p:spTree>
+    <p:extLst>
+      <p:ext uri="{BB962C8B-B14F-4D97-AF65-F5344CB8AC3E}">
+        <p14:creationId xmlns:p14="http://schemas.microsoft.com/office/powerpoint/2010/main" val="134648289"/>
       </p:ext>
     </p:extLst>
   </p:cSld>
@@ -5092,7 +6821,6 @@
               <a:rPr lang="ru-RU" dirty="0"/>
               <a:t>Требования к архитектуре компьютерных сетей</a:t>
             </a:r>
-            <a:endParaRPr lang="ru-RU" dirty="0"/>
           </a:p>
         </p:txBody>
       </p:sp>

--- a/1.1 Introdution/1.1 Intro.pptx
+++ b/1.1 Introdution/1.1 Intro.pptx
@@ -11,21 +11,23 @@
     <p:sldId id="259" r:id="rId5"/>
     <p:sldId id="260" r:id="rId6"/>
     <p:sldId id="261" r:id="rId7"/>
-    <p:sldId id="262" r:id="rId8"/>
-    <p:sldId id="263" r:id="rId9"/>
-    <p:sldId id="264" r:id="rId10"/>
-    <p:sldId id="265" r:id="rId11"/>
-    <p:sldId id="266" r:id="rId12"/>
-    <p:sldId id="267" r:id="rId13"/>
-    <p:sldId id="268" r:id="rId14"/>
-    <p:sldId id="269" r:id="rId15"/>
-    <p:sldId id="270" r:id="rId16"/>
-    <p:sldId id="271" r:id="rId17"/>
-    <p:sldId id="272" r:id="rId18"/>
-    <p:sldId id="273" r:id="rId19"/>
-    <p:sldId id="274" r:id="rId20"/>
-    <p:sldId id="275" r:id="rId21"/>
-    <p:sldId id="276" r:id="rId22"/>
+    <p:sldId id="277" r:id="rId8"/>
+    <p:sldId id="278" r:id="rId9"/>
+    <p:sldId id="279" r:id="rId10"/>
+    <p:sldId id="263" r:id="rId11"/>
+    <p:sldId id="264" r:id="rId12"/>
+    <p:sldId id="265" r:id="rId13"/>
+    <p:sldId id="266" r:id="rId14"/>
+    <p:sldId id="267" r:id="rId15"/>
+    <p:sldId id="268" r:id="rId16"/>
+    <p:sldId id="269" r:id="rId17"/>
+    <p:sldId id="270" r:id="rId18"/>
+    <p:sldId id="271" r:id="rId19"/>
+    <p:sldId id="272" r:id="rId20"/>
+    <p:sldId id="273" r:id="rId21"/>
+    <p:sldId id="274" r:id="rId22"/>
+    <p:sldId id="275" r:id="rId23"/>
+    <p:sldId id="276" r:id="rId24"/>
   </p:sldIdLst>
   <p:sldSz cx="12192000" cy="6858000"/>
   <p:notesSz cx="6858000" cy="9144000"/>
@@ -332,7 +334,7 @@
           <a:p>
             <a:fld id="{80E38E48-C2A3-4581-BEEE-BDFDC959DF33}" type="datetimeFigureOut">
               <a:rPr lang="ru-RU" smtClean="0"/>
-              <a:t>30.08.2026</a:t>
+              <a:t>31.08.2026</a:t>
             </a:fld>
             <a:endParaRPr lang="ru-RU"/>
           </a:p>
@@ -522,7 +524,7 @@
           <a:p>
             <a:fld id="{80E38E48-C2A3-4581-BEEE-BDFDC959DF33}" type="datetimeFigureOut">
               <a:rPr lang="ru-RU" smtClean="0"/>
-              <a:t>30.08.2026</a:t>
+              <a:t>31.08.2026</a:t>
             </a:fld>
             <a:endParaRPr lang="ru-RU"/>
           </a:p>
@@ -702,7 +704,7 @@
           <a:p>
             <a:fld id="{80E38E48-C2A3-4581-BEEE-BDFDC959DF33}" type="datetimeFigureOut">
               <a:rPr lang="ru-RU" smtClean="0"/>
-              <a:t>30.08.2026</a:t>
+              <a:t>31.08.2026</a:t>
             </a:fld>
             <a:endParaRPr lang="ru-RU"/>
           </a:p>
@@ -872,7 +874,7 @@
           <a:p>
             <a:fld id="{80E38E48-C2A3-4581-BEEE-BDFDC959DF33}" type="datetimeFigureOut">
               <a:rPr lang="ru-RU" smtClean="0"/>
-              <a:t>30.08.2026</a:t>
+              <a:t>31.08.2026</a:t>
             </a:fld>
             <a:endParaRPr lang="ru-RU"/>
           </a:p>
@@ -1128,7 +1130,7 @@
           <a:p>
             <a:fld id="{80E38E48-C2A3-4581-BEEE-BDFDC959DF33}" type="datetimeFigureOut">
               <a:rPr lang="ru-RU" smtClean="0"/>
-              <a:t>30.08.2026</a:t>
+              <a:t>31.08.2026</a:t>
             </a:fld>
             <a:endParaRPr lang="ru-RU"/>
           </a:p>
@@ -1416,7 +1418,7 @@
           <a:p>
             <a:fld id="{80E38E48-C2A3-4581-BEEE-BDFDC959DF33}" type="datetimeFigureOut">
               <a:rPr lang="ru-RU" smtClean="0"/>
-              <a:t>30.08.2026</a:t>
+              <a:t>31.08.2026</a:t>
             </a:fld>
             <a:endParaRPr lang="ru-RU"/>
           </a:p>
@@ -1854,7 +1856,7 @@
           <a:p>
             <a:fld id="{80E38E48-C2A3-4581-BEEE-BDFDC959DF33}" type="datetimeFigureOut">
               <a:rPr lang="ru-RU" smtClean="0"/>
-              <a:t>30.08.2026</a:t>
+              <a:t>31.08.2026</a:t>
             </a:fld>
             <a:endParaRPr lang="ru-RU"/>
           </a:p>
@@ -1972,7 +1974,7 @@
           <a:p>
             <a:fld id="{80E38E48-C2A3-4581-BEEE-BDFDC959DF33}" type="datetimeFigureOut">
               <a:rPr lang="ru-RU" smtClean="0"/>
-              <a:t>30.08.2026</a:t>
+              <a:t>31.08.2026</a:t>
             </a:fld>
             <a:endParaRPr lang="ru-RU"/>
           </a:p>
@@ -2067,7 +2069,7 @@
           <a:p>
             <a:fld id="{80E38E48-C2A3-4581-BEEE-BDFDC959DF33}" type="datetimeFigureOut">
               <a:rPr lang="ru-RU" smtClean="0"/>
-              <a:t>30.08.2026</a:t>
+              <a:t>31.08.2026</a:t>
             </a:fld>
             <a:endParaRPr lang="ru-RU"/>
           </a:p>
@@ -2423,7 +2425,7 @@
           <a:p>
             <a:fld id="{80E38E48-C2A3-4581-BEEE-BDFDC959DF33}" type="datetimeFigureOut">
               <a:rPr lang="ru-RU" smtClean="0"/>
-              <a:t>30.08.2026</a:t>
+              <a:t>31.08.2026</a:t>
             </a:fld>
             <a:endParaRPr lang="ru-RU"/>
           </a:p>
@@ -2739,7 +2741,7 @@
           <a:p>
             <a:fld id="{80E38E48-C2A3-4581-BEEE-BDFDC959DF33}" type="datetimeFigureOut">
               <a:rPr lang="ru-RU" smtClean="0"/>
-              <a:t>30.08.2026</a:t>
+              <a:t>31.08.2026</a:t>
             </a:fld>
             <a:endParaRPr lang="ru-RU"/>
           </a:p>
@@ -2972,7 +2974,7 @@
           <a:p>
             <a:fld id="{80E38E48-C2A3-4581-BEEE-BDFDC959DF33}" type="datetimeFigureOut">
               <a:rPr lang="ru-RU" smtClean="0"/>
-              <a:t>30.08.2026</a:t>
+              <a:t>31.08.2026</a:t>
             </a:fld>
             <a:endParaRPr lang="ru-RU"/>
           </a:p>
@@ -3472,138 +3474,127 @@
         </p:nvSpPr>
         <p:spPr/>
         <p:txBody>
+          <a:bodyPr/>
+          <a:lstStyle/>
+          <a:p>
+            <a:r>
+              <a:rPr lang="ru-RU" dirty="0"/>
+              <a:t>Требования к архитектуре компьютерных сетей</a:t>
+            </a:r>
+          </a:p>
+        </p:txBody>
+      </p:sp>
+      <p:sp>
+        <p:nvSpPr>
+          <p:cNvPr id="3" name="Объект 2"/>
+          <p:cNvSpPr>
+            <a:spLocks noGrp="1"/>
+          </p:cNvSpPr>
+          <p:nvPr>
+            <p:ph sz="half" idx="1"/>
+          </p:nvPr>
+        </p:nvSpPr>
+        <p:spPr>
+          <a:xfrm>
+            <a:off x="676656" y="1998134"/>
+            <a:ext cx="4663440" cy="3497058"/>
+          </a:xfrm>
+        </p:spPr>
+        <p:txBody>
           <a:bodyPr>
-            <a:normAutofit fontScale="90000"/>
+            <a:normAutofit/>
           </a:bodyPr>
           <a:lstStyle/>
           <a:p>
+            <a:endParaRPr lang="ru-RU" dirty="0"/>
+          </a:p>
+          <a:p>
+            <a:pPr lvl="1">
+              <a:buFont typeface="Arial" panose="020B0604020202020204" pitchFamily="34" charset="0"/>
+              <a:buChar char="•"/>
+            </a:pPr>
             <a:r>
               <a:rPr lang="ru-RU" dirty="0"/>
-              <a:t>Взгляд пользователя: Надёжность и Экономика</a:t>
-            </a:r>
-            <a:r>
-              <a:rPr lang="ru-RU" b="1" dirty="0"/>
+              <a:t>Зачем формулировать требования?</a:t>
+            </a:r>
+          </a:p>
+          <a:p>
+            <a:pPr lvl="1">
+              <a:buFont typeface="Arial" panose="020B0604020202020204" pitchFamily="34" charset="0"/>
+              <a:buChar char="•"/>
+            </a:pPr>
+            <a:r>
+              <a:rPr lang="ru-RU" dirty="0"/>
+              <a:t>Три взгляда на одну систему: Пользователь, Разработчик, Оператор</a:t>
+            </a:r>
+          </a:p>
+          <a:p>
+            <a:pPr lvl="1">
+              <a:buFont typeface="Arial" panose="020B0604020202020204" pitchFamily="34" charset="0"/>
+              <a:buChar char="•"/>
+            </a:pPr>
+            <a:r>
+              <a:rPr lang="ru-RU" dirty="0"/>
+              <a:t>Сеть как система архитектурных компромиссов</a:t>
+            </a:r>
+          </a:p>
+          <a:p>
+            <a:r>
+              <a:rPr lang="ru-RU" dirty="0"/>
               <a:t/>
             </a:r>
             <a:br>
-              <a:rPr lang="ru-RU" b="1" dirty="0"/>
+              <a:rPr lang="ru-RU" dirty="0"/>
             </a:br>
             <a:endParaRPr lang="ru-RU" dirty="0"/>
           </a:p>
         </p:txBody>
       </p:sp>
-      <p:sp>
-        <p:nvSpPr>
-          <p:cNvPr id="3" name="Объект 2"/>
-          <p:cNvSpPr>
-            <a:spLocks noGrp="1"/>
-          </p:cNvSpPr>
-          <p:nvPr>
-            <p:ph sz="half" idx="1"/>
-          </p:nvPr>
-        </p:nvSpPr>
-        <p:spPr>
+      <p:pic>
+        <p:nvPicPr>
+          <p:cNvPr id="1026" name="Picture 2" descr="Проектирование локальных вычислительных сетей (ЛВС) предприятия - на  zwsoft.ru"/>
+          <p:cNvPicPr>
+            <a:picLocks noChangeAspect="1" noChangeArrowheads="1"/>
+          </p:cNvPicPr>
+          <p:nvPr/>
+        </p:nvPicPr>
+        <p:blipFill>
+          <a:blip r:embed="rId2">
+            <a:extLst>
+              <a:ext uri="{28A0092B-C50C-407E-A947-70E740481C1C}">
+                <a14:useLocalDpi xmlns:a14="http://schemas.microsoft.com/office/drawing/2010/main" val="0"/>
+              </a:ext>
+            </a:extLst>
+          </a:blip>
+          <a:srcRect/>
+          <a:stretch>
+            <a:fillRect/>
+          </a:stretch>
+        </p:blipFill>
+        <p:spPr bwMode="auto">
           <a:xfrm>
-            <a:off x="520942" y="3010585"/>
-            <a:ext cx="11045338" cy="2018615"/>
+            <a:off x="5359528" y="2603296"/>
+            <a:ext cx="6291528" cy="2891896"/>
           </a:xfrm>
+          <a:prstGeom prst="rect">
+            <a:avLst/>
+          </a:prstGeom>
+          <a:noFill/>
+          <a:extLst>
+            <a:ext uri="{909E8E84-426E-40DD-AFC4-6F175D3DCCD1}">
+              <a14:hiddenFill xmlns:a14="http://schemas.microsoft.com/office/drawing/2010/main">
+                <a:solidFill>
+                  <a:srgbClr val="FFFFFF"/>
+                </a:solidFill>
+              </a14:hiddenFill>
+            </a:ext>
+          </a:extLst>
         </p:spPr>
-        <p:txBody>
-          <a:bodyPr>
-            <a:normAutofit fontScale="92500" lnSpcReduction="10000"/>
-          </a:bodyPr>
-          <a:lstStyle/>
-          <a:p>
-            <a:r>
-              <a:rPr lang="ru-RU" b="1" dirty="0"/>
-              <a:t>Надёжность (</a:t>
-            </a:r>
-            <a:r>
-              <a:rPr lang="ru-RU" b="1" dirty="0" err="1"/>
-              <a:t>Reliability</a:t>
-            </a:r>
-            <a:r>
-              <a:rPr lang="ru-RU" b="1" dirty="0"/>
-              <a:t>):</a:t>
-            </a:r>
-            <a:endParaRPr lang="ru-RU" dirty="0"/>
-          </a:p>
-          <a:p>
-            <a:pPr lvl="1"/>
-            <a:r>
-              <a:rPr lang="ru-RU" dirty="0"/>
-              <a:t>Скрытие сбоев физического уровня.</a:t>
-            </a:r>
-          </a:p>
-          <a:p>
-            <a:pPr lvl="1"/>
-            <a:r>
-              <a:rPr lang="ru-RU" dirty="0"/>
-              <a:t>Автоматическая маршрутизация в обход аварийных узлов.</a:t>
-            </a:r>
-          </a:p>
-          <a:p>
-            <a:r>
-              <a:rPr lang="ru-RU" b="1" dirty="0"/>
-              <a:t>Стоимость (</a:t>
-            </a:r>
-            <a:r>
-              <a:rPr lang="ru-RU" b="1" dirty="0" err="1"/>
-              <a:t>Cost</a:t>
-            </a:r>
-            <a:r>
-              <a:rPr lang="ru-RU" b="1" dirty="0"/>
-              <a:t> </a:t>
-            </a:r>
-            <a:r>
-              <a:rPr lang="ru-RU" b="1" dirty="0" err="1"/>
-              <a:t>Efficiency</a:t>
-            </a:r>
-            <a:r>
-              <a:rPr lang="ru-RU" b="1" dirty="0"/>
-              <a:t>):</a:t>
-            </a:r>
-            <a:endParaRPr lang="ru-RU" dirty="0"/>
-          </a:p>
-          <a:p>
-            <a:pPr lvl="1"/>
-            <a:r>
-              <a:rPr lang="ru-RU" dirty="0"/>
-              <a:t>Эффект масштаба: совместное использование ресурсов (</a:t>
-            </a:r>
-            <a:r>
-              <a:rPr lang="ru-RU" dirty="0" err="1"/>
-              <a:t>Statistical</a:t>
-            </a:r>
-            <a:r>
-              <a:rPr lang="ru-RU" dirty="0"/>
-              <a:t> </a:t>
-            </a:r>
-            <a:r>
-              <a:rPr lang="ru-RU" dirty="0" err="1"/>
-              <a:t>Multiplexing</a:t>
-            </a:r>
-            <a:r>
-              <a:rPr lang="ru-RU" dirty="0"/>
-              <a:t>).</a:t>
-            </a:r>
-          </a:p>
-          <a:p>
-            <a:pPr lvl="1"/>
-            <a:r>
-              <a:rPr lang="ru-RU" dirty="0"/>
-              <a:t>Минимизация стоимости владения и подключения.</a:t>
-            </a:r>
-          </a:p>
-          <a:p>
-            <a:endParaRPr lang="ru-RU" dirty="0"/>
-          </a:p>
-        </p:txBody>
-      </p:sp>
+      </p:pic>
     </p:spTree>
     <p:extLst>
       <p:ext uri="{BB962C8B-B14F-4D97-AF65-F5344CB8AC3E}">
-        <p14:creationId xmlns:p14="http://schemas.microsoft.com/office/powerpoint/2010/main" val="2581711807"/>
+        <p14:creationId xmlns:p14="http://schemas.microsoft.com/office/powerpoint/2010/main" val="536911378"/>
       </p:ext>
     </p:extLst>
   </p:cSld>
@@ -3642,13 +3633,27 @@
         </p:nvSpPr>
         <p:spPr/>
         <p:txBody>
-          <a:bodyPr/>
+          <a:bodyPr>
+            <a:normAutofit fontScale="90000"/>
+          </a:bodyPr>
           <a:lstStyle/>
           <a:p>
             <a:r>
               <a:rPr lang="ru-RU" dirty="0"/>
-              <a:t>Требования разработчика: Абстракция канала</a:t>
-            </a:r>
+              <a:t>Взгляд пользователя: Производительность </a:t>
+            </a:r>
+            <a:r>
+              <a:rPr lang="ru-RU" dirty="0" smtClean="0"/>
+              <a:t>сети</a:t>
+            </a:r>
+            <a:r>
+              <a:rPr lang="ru-RU" b="1" dirty="0"/>
+              <a:t/>
+            </a:r>
+            <a:br>
+              <a:rPr lang="ru-RU" b="1" dirty="0"/>
+            </a:br>
+            <a:endParaRPr lang="ru-RU" dirty="0"/>
           </a:p>
         </p:txBody>
       </p:sp>
@@ -3664,123 +3669,60 @@
         </p:nvSpPr>
         <p:spPr>
           <a:xfrm>
-            <a:off x="657224" y="2226735"/>
-            <a:ext cx="11212391" cy="3752036"/>
+            <a:off x="520942" y="3010585"/>
+            <a:ext cx="11045338" cy="2018615"/>
           </a:xfrm>
         </p:spPr>
         <p:txBody>
-          <a:bodyPr>
-            <a:normAutofit/>
-          </a:bodyPr>
-          <a:lstStyle/>
-          <a:p>
+          <a:bodyPr/>
+          <a:lstStyle/>
+          <a:p>
+            <a:r>
+              <a:rPr lang="ru-RU" dirty="0" err="1"/>
+              <a:t>Bandwidth</a:t>
+            </a:r>
+            <a:r>
+              <a:rPr lang="ru-RU" dirty="0"/>
+              <a:t> (Пропускная </a:t>
+            </a:r>
             <a:r>
               <a:rPr lang="ru-RU" dirty="0" smtClean="0"/>
-              <a:t>Абстракция</a:t>
+              <a:t>способность) - объем </a:t>
             </a:r>
             <a:r>
               <a:rPr lang="ru-RU" dirty="0"/>
-              <a:t>.</a:t>
+              <a:t>данных, передаваемый в единицу времени (измеряется в битах в секунду, бит/с).</a:t>
+            </a:r>
+          </a:p>
+          <a:p>
+            <a:pPr lvl="1"/>
+            <a:endParaRPr lang="ru-RU" dirty="0"/>
+          </a:p>
+          <a:p>
+            <a:r>
+              <a:rPr lang="ru-RU" dirty="0" err="1"/>
+              <a:t>Latency</a:t>
+            </a:r>
+            <a:r>
+              <a:rPr lang="ru-RU" dirty="0"/>
+              <a:t> (Задержка</a:t>
             </a:r>
             <a:r>
               <a:rPr lang="ru-RU" dirty="0" smtClean="0"/>
-              <a:t> </a:t>
+              <a:t>) - </a:t>
             </a:r>
             <a:r>
               <a:rPr lang="ru-RU" dirty="0"/>
-              <a:t>Изоляция от «железа» и физики среды.</a:t>
-            </a:r>
-          </a:p>
-          <a:p>
-            <a:r>
-              <a:rPr lang="ru-RU" dirty="0" smtClean="0"/>
-              <a:t>Разные </a:t>
+              <a:t>время, которое требуется одному биту данных, чтобы пройти от отправителя до получателя (измеряется в миллисекундах, </a:t>
+            </a:r>
+            <a:r>
+              <a:rPr lang="ru-RU" dirty="0" err="1"/>
+              <a:t>мс</a:t>
             </a:r>
             <a:r>
               <a:rPr lang="ru-RU" dirty="0"/>
-              <a:t>типы каналов:</a:t>
-            </a:r>
-          </a:p>
-          <a:p>
-            <a:pPr lvl="1">
-              <a:buFont typeface="Arial" panose="020B0604020202020204" pitchFamily="34" charset="0"/>
-              <a:buChar char="•"/>
-            </a:pPr>
-            <a:r>
-              <a:rPr lang="ru-RU" b="1" dirty="0"/>
-              <a:t>Канал типа «запрос-ответ»:</a:t>
-            </a:r>
-            <a:r>
-              <a:rPr lang="ru-RU" dirty="0"/>
-              <a:t> используется приложениями, которые работают по принципу «клиент-сервер» (например, веб-браузер, запрашивающий страницу).</a:t>
-            </a:r>
-          </a:p>
-          <a:p>
-            <a:pPr lvl="1">
-              <a:buFont typeface="Arial" panose="020B0604020202020204" pitchFamily="34" charset="0"/>
-              <a:buChar char="•"/>
-            </a:pPr>
-            <a:r>
-              <a:rPr lang="ru-RU" b="1" dirty="0"/>
-              <a:t>Потоковый канал</a:t>
-            </a:r>
-            <a:r>
-              <a:rPr lang="ru-RU" dirty="0"/>
-              <a:t> используется приложениями, передающими непрерывные потоки данных (например, аудио или видео в реальном времени).</a:t>
-            </a:r>
-          </a:p>
-          <a:p>
-            <a:r>
-              <a:rPr lang="ru-RU" dirty="0" smtClean="0"/>
-              <a:t>Гибкость и универсальность:</a:t>
-            </a:r>
-          </a:p>
-          <a:p>
-            <a:pPr lvl="1">
-              <a:buFont typeface="Arial" panose="020B0604020202020204" pitchFamily="34" charset="0"/>
-              <a:buChar char="•"/>
-            </a:pPr>
-            <a:r>
-              <a:rPr lang="ru-RU" dirty="0" err="1"/>
-              <a:t>End-to-End</a:t>
-            </a:r>
-            <a:r>
-              <a:rPr lang="ru-RU" dirty="0"/>
-              <a:t> </a:t>
-            </a:r>
-            <a:r>
-              <a:rPr lang="ru-RU" dirty="0" err="1"/>
-              <a:t>Principle</a:t>
-            </a:r>
-            <a:r>
-              <a:rPr lang="ru-RU" dirty="0"/>
-              <a:t> (Сквозной принцип): интеллект на хостах, простота внутри сети.</a:t>
-            </a:r>
-          </a:p>
-          <a:p>
-            <a:pPr lvl="1">
-              <a:buFont typeface="Arial" panose="020B0604020202020204" pitchFamily="34" charset="0"/>
-              <a:buChar char="•"/>
-            </a:pPr>
-            <a:r>
-              <a:rPr lang="ru-RU" dirty="0" err="1"/>
-              <a:t>Hourglass</a:t>
-            </a:r>
-            <a:r>
-              <a:rPr lang="ru-RU" dirty="0"/>
-              <a:t> </a:t>
-            </a:r>
-            <a:r>
-              <a:rPr lang="ru-RU" dirty="0" err="1"/>
-              <a:t>Model</a:t>
-            </a:r>
-            <a:r>
-              <a:rPr lang="ru-RU" dirty="0"/>
-              <a:t> («Песочные часы» IP): единый тонкий межсетевой уровень для любого «железа» и любых программ.</a:t>
-            </a:r>
-          </a:p>
-          <a:p>
-            <a:endParaRPr lang="ru-RU" dirty="0" smtClean="0"/>
+              <a:t>).</a:t>
+            </a:r>
           </a:p>
           <a:p>
             <a:endParaRPr lang="ru-RU" dirty="0"/>
@@ -3790,7 +3732,7 @@
     </p:spTree>
     <p:extLst>
       <p:ext uri="{BB962C8B-B14F-4D97-AF65-F5344CB8AC3E}">
-        <p14:creationId xmlns:p14="http://schemas.microsoft.com/office/powerpoint/2010/main" val="1473131457"/>
+        <p14:creationId xmlns:p14="http://schemas.microsoft.com/office/powerpoint/2010/main" val="904879319"/>
       </p:ext>
     </p:extLst>
   </p:cSld>
@@ -3829,13 +3771,23 @@
         </p:nvSpPr>
         <p:spPr/>
         <p:txBody>
-          <a:bodyPr/>
+          <a:bodyPr>
+            <a:normAutofit fontScale="90000"/>
+          </a:bodyPr>
           <a:lstStyle/>
           <a:p>
             <a:r>
               <a:rPr lang="ru-RU" dirty="0"/>
-              <a:t>Взгляд оператора: Эксплуатация сети</a:t>
-            </a:r>
+              <a:t>Взгляд пользователя: Надёжность и Экономика</a:t>
+            </a:r>
+            <a:r>
+              <a:rPr lang="ru-RU" b="1" dirty="0"/>
+              <a:t/>
+            </a:r>
+            <a:br>
+              <a:rPr lang="ru-RU" b="1" dirty="0"/>
+            </a:br>
+            <a:endParaRPr lang="ru-RU" dirty="0"/>
           </a:p>
         </p:txBody>
       </p:sp>
@@ -3851,195 +3803,106 @@
         </p:nvSpPr>
         <p:spPr>
           <a:xfrm>
-            <a:off x="657224" y="1725571"/>
-            <a:ext cx="11080507" cy="3479475"/>
+            <a:off x="520942" y="3010585"/>
+            <a:ext cx="11045338" cy="2018615"/>
           </a:xfrm>
         </p:spPr>
         <p:txBody>
           <a:bodyPr>
-            <a:noAutofit/>
+            <a:normAutofit fontScale="92500" lnSpcReduction="10000"/>
           </a:bodyPr>
           <a:lstStyle/>
           <a:p>
             <a:r>
-              <a:rPr lang="ru-RU" sz="2800" dirty="0"/>
-              <a:t>Масштабируемость (</a:t>
-            </a:r>
-            <a:r>
-              <a:rPr lang="ru-RU" sz="2800" dirty="0" err="1"/>
-              <a:t>Scalability</a:t>
-            </a:r>
-            <a:r>
-              <a:rPr lang="ru-RU" sz="2800" dirty="0"/>
+              <a:rPr lang="ru-RU" b="1" dirty="0"/>
+              <a:t>Надёжность (</a:t>
+            </a:r>
+            <a:r>
+              <a:rPr lang="ru-RU" b="1" dirty="0" err="1"/>
+              <a:t>Reliability</a:t>
+            </a:r>
+            <a:r>
+              <a:rPr lang="ru-RU" b="1" dirty="0"/>
               <a:t>):</a:t>
             </a:r>
-          </a:p>
-          <a:p>
-            <a:pPr lvl="1">
-              <a:buFont typeface="Arial" panose="020B0604020202020204" pitchFamily="34" charset="0"/>
-              <a:buChar char="•"/>
-            </a:pPr>
-            <a:r>
-              <a:rPr lang="ru-RU" sz="2400" dirty="0"/>
-              <a:t>Стабильность метрик при росте </a:t>
-            </a:r>
-            <a:r>
-              <a:rPr lang="ru-RU" sz="2400" dirty="0" smtClean="0"/>
-              <a:t>сети.</a:t>
-            </a:r>
-          </a:p>
-          <a:p>
-            <a:r>
-              <a:rPr lang="ru-RU" sz="2800" dirty="0" smtClean="0"/>
-              <a:t>Простота </a:t>
-            </a:r>
-            <a:r>
-              <a:rPr lang="ru-RU" sz="2800" dirty="0"/>
-              <a:t>управления (</a:t>
-            </a:r>
-            <a:r>
-              <a:rPr lang="ru-RU" sz="2800" dirty="0" err="1"/>
-              <a:t>Ease</a:t>
-            </a:r>
-            <a:r>
-              <a:rPr lang="ru-RU" sz="2800" dirty="0"/>
+            <a:endParaRPr lang="ru-RU" dirty="0"/>
+          </a:p>
+          <a:p>
+            <a:pPr lvl="1"/>
+            <a:r>
+              <a:rPr lang="ru-RU" dirty="0"/>
+              <a:t>Скрытие сбоев физического уровня.</a:t>
+            </a:r>
+          </a:p>
+          <a:p>
+            <a:pPr lvl="1"/>
+            <a:r>
+              <a:rPr lang="ru-RU" dirty="0"/>
+              <a:t>Автоматическая маршрутизация в обход аварийных узлов.</a:t>
+            </a:r>
+          </a:p>
+          <a:p>
+            <a:r>
+              <a:rPr lang="ru-RU" b="1" dirty="0"/>
+              <a:t>Стоимость (</a:t>
+            </a:r>
+            <a:r>
+              <a:rPr lang="ru-RU" b="1" dirty="0" err="1"/>
+              <a:t>Cost</a:t>
+            </a:r>
+            <a:r>
+              <a:rPr lang="ru-RU" b="1" dirty="0"/>
               <a:t> </a:t>
             </a:r>
             <a:r>
-              <a:rPr lang="ru-RU" sz="2800" dirty="0" err="1"/>
-              <a:t>of</a:t>
-            </a:r>
-            <a:r>
-              <a:rPr lang="ru-RU" sz="2800" dirty="0"/>
+              <a:rPr lang="ru-RU" b="1" dirty="0" err="1"/>
+              <a:t>Efficiency</a:t>
+            </a:r>
+            <a:r>
+              <a:rPr lang="ru-RU" b="1" dirty="0"/>
+              <a:t>):</a:t>
+            </a:r>
+            <a:endParaRPr lang="ru-RU" dirty="0"/>
+          </a:p>
+          <a:p>
+            <a:pPr lvl="1"/>
+            <a:r>
+              <a:rPr lang="ru-RU" dirty="0"/>
+              <a:t>Эффект масштаба: совместное использование ресурсов (</a:t>
+            </a:r>
+            <a:r>
+              <a:rPr lang="ru-RU" dirty="0" err="1"/>
+              <a:t>Statistical</a:t>
+            </a:r>
+            <a:r>
+              <a:rPr lang="ru-RU" dirty="0"/>
               <a:t> </a:t>
             </a:r>
             <a:r>
-              <a:rPr lang="ru-RU" sz="2800" dirty="0" err="1"/>
-              <a:t>Management</a:t>
-            </a:r>
-            <a:r>
-              <a:rPr lang="ru-RU" sz="2800" dirty="0"/>
-              <a:t>):</a:t>
-            </a:r>
-          </a:p>
-          <a:p>
-            <a:pPr lvl="1">
-              <a:buFont typeface="Arial" panose="020B0604020202020204" pitchFamily="34" charset="0"/>
-              <a:buChar char="•"/>
-            </a:pPr>
-            <a:r>
-              <a:rPr lang="ru-RU" sz="2400" dirty="0"/>
-              <a:t>Централизованный и распределенный мониторинг.</a:t>
-            </a:r>
-          </a:p>
-          <a:p>
-            <a:pPr lvl="1">
-              <a:buFont typeface="Arial" panose="020B0604020202020204" pitchFamily="34" charset="0"/>
-              <a:buChar char="•"/>
-            </a:pPr>
-            <a:r>
-              <a:rPr lang="ru-RU" sz="2400" dirty="0"/>
-              <a:t>Быстрая локализация инцидентов и автоматизация конфигураций</a:t>
-            </a:r>
-            <a:r>
-              <a:rPr lang="ru-RU" sz="2400" dirty="0" smtClean="0"/>
-              <a:t>.</a:t>
-            </a:r>
-          </a:p>
-          <a:p>
-            <a:r>
-              <a:rPr lang="ru-RU" sz="2800" dirty="0"/>
-              <a:t>Безопасность (</a:t>
-            </a:r>
-            <a:r>
-              <a:rPr lang="ru-RU" sz="2800" dirty="0" err="1"/>
-              <a:t>Security</a:t>
-            </a:r>
-            <a:r>
-              <a:rPr lang="ru-RU" sz="2800" dirty="0"/>
-              <a:t>):</a:t>
-            </a:r>
-          </a:p>
-          <a:p>
-            <a:pPr lvl="1">
-              <a:buFont typeface="Arial" panose="020B0604020202020204" pitchFamily="34" charset="0"/>
-              <a:buChar char="•"/>
-            </a:pPr>
-            <a:r>
-              <a:rPr lang="ru-RU" sz="2800" dirty="0"/>
-              <a:t>Разграничение доступа (AAA).</a:t>
-            </a:r>
-          </a:p>
-          <a:p>
-            <a:pPr lvl="1">
-              <a:buFont typeface="Arial" panose="020B0604020202020204" pitchFamily="34" charset="0"/>
-              <a:buChar char="•"/>
-            </a:pPr>
-            <a:r>
-              <a:rPr lang="ru-RU" sz="2800" dirty="0"/>
-              <a:t>Защита инфраструктуры от </a:t>
-            </a:r>
-            <a:r>
-              <a:rPr lang="ru-RU" sz="2800" dirty="0" err="1"/>
-              <a:t>DDoS</a:t>
-            </a:r>
-            <a:r>
-              <a:rPr lang="ru-RU" sz="2800" dirty="0"/>
-              <a:t> и атак на протоколы маршрутизации.</a:t>
-            </a:r>
-          </a:p>
-          <a:p>
-            <a:r>
-              <a:rPr lang="ru-RU" sz="2800" dirty="0"/>
-              <a:t>Адаптивность (</a:t>
-            </a:r>
-            <a:r>
-              <a:rPr lang="ru-RU" sz="2800" dirty="0" err="1"/>
-              <a:t>Evolvability</a:t>
-            </a:r>
-            <a:r>
-              <a:rPr lang="ru-RU" sz="2800" dirty="0"/>
-              <a:t>):</a:t>
-            </a:r>
-          </a:p>
-          <a:p>
-            <a:pPr lvl="1">
-              <a:buFont typeface="Arial" panose="020B0604020202020204" pitchFamily="34" charset="0"/>
-              <a:buChar char="•"/>
-            </a:pPr>
-            <a:r>
-              <a:rPr lang="ru-RU" sz="2800" dirty="0"/>
-              <a:t>Замена узлов и стандартов без остановки сети (</a:t>
-            </a:r>
-            <a:r>
-              <a:rPr lang="ru-RU" sz="2800" dirty="0" err="1"/>
-              <a:t>backward</a:t>
-            </a:r>
-            <a:r>
-              <a:rPr lang="ru-RU" sz="2800" dirty="0"/>
-              <a:t> </a:t>
-            </a:r>
-            <a:r>
-              <a:rPr lang="ru-RU" sz="2800" dirty="0" err="1"/>
-              <a:t>compatibility</a:t>
-            </a:r>
-            <a:r>
-              <a:rPr lang="ru-RU" sz="2800" dirty="0"/>
+              <a:rPr lang="ru-RU" dirty="0" err="1"/>
+              <a:t>Multiplexing</a:t>
+            </a:r>
+            <a:r>
+              <a:rPr lang="ru-RU" dirty="0"/>
               <a:t>).</a:t>
             </a:r>
           </a:p>
           <a:p>
-            <a:pPr marL="4572" lvl="1" indent="0">
-              <a:buNone/>
-            </a:pPr>
-            <a:endParaRPr lang="ru-RU" sz="3200" dirty="0"/>
+            <a:pPr lvl="1"/>
+            <a:r>
+              <a:rPr lang="ru-RU" dirty="0"/>
+              <a:t>Минимизация стоимости владения и подключения.</a:t>
+            </a:r>
+          </a:p>
+          <a:p>
+            <a:endParaRPr lang="ru-RU" dirty="0"/>
           </a:p>
         </p:txBody>
       </p:sp>
     </p:spTree>
     <p:extLst>
       <p:ext uri="{BB962C8B-B14F-4D97-AF65-F5344CB8AC3E}">
-        <p14:creationId xmlns:p14="http://schemas.microsoft.com/office/powerpoint/2010/main" val="824875538"/>
+        <p14:creationId xmlns:p14="http://schemas.microsoft.com/office/powerpoint/2010/main" val="2581711807"/>
       </p:ext>
     </p:extLst>
   </p:cSld>
@@ -4068,92 +3931,155 @@
       </p:grpSpPr>
       <p:sp>
         <p:nvSpPr>
-          <p:cNvPr id="5" name="Заголовок 4"/>
+          <p:cNvPr id="2" name="Заголовок 1"/>
           <p:cNvSpPr>
             <a:spLocks noGrp="1"/>
           </p:cNvSpPr>
           <p:nvPr>
             <p:ph type="title"/>
+          </p:nvPr>
+        </p:nvSpPr>
+        <p:spPr/>
+        <p:txBody>
+          <a:bodyPr/>
+          <a:lstStyle/>
+          <a:p>
+            <a:r>
+              <a:rPr lang="ru-RU" dirty="0"/>
+              <a:t>Требования разработчика: Абстракция канала</a:t>
+            </a:r>
+          </a:p>
+        </p:txBody>
+      </p:sp>
+      <p:sp>
+        <p:nvSpPr>
+          <p:cNvPr id="3" name="Объект 2"/>
+          <p:cNvSpPr>
+            <a:spLocks noGrp="1"/>
+          </p:cNvSpPr>
+          <p:nvPr>
+            <p:ph sz="half" idx="1"/>
           </p:nvPr>
         </p:nvSpPr>
         <p:spPr>
           <a:xfrm>
-            <a:off x="657224" y="499533"/>
-            <a:ext cx="10772775" cy="3534378"/>
+            <a:off x="657224" y="2226735"/>
+            <a:ext cx="11212391" cy="3752036"/>
           </a:xfrm>
         </p:spPr>
         <p:txBody>
           <a:bodyPr>
-            <a:normAutofit fontScale="90000"/>
+            <a:normAutofit/>
           </a:bodyPr>
           <a:lstStyle/>
           <a:p>
             <a:r>
+              <a:rPr lang="ru-RU" dirty="0" smtClean="0"/>
+              <a:t>Абстракция</a:t>
+            </a:r>
+            <a:r>
+              <a:rPr lang="ru-RU" dirty="0"/>
+              <a:t>.</a:t>
+            </a:r>
+            <a:r>
+              <a:rPr lang="ru-RU" dirty="0" smtClean="0"/>
+              <a:t> </a:t>
+            </a:r>
+            <a:r>
+              <a:rPr lang="ru-RU" dirty="0"/>
+              <a:t>Изоляция от «железа» и физики среды.</a:t>
+            </a:r>
+          </a:p>
+          <a:p>
+            <a:r>
+              <a:rPr lang="ru-RU" dirty="0" smtClean="0"/>
+              <a:t>Разные </a:t>
+            </a:r>
+            <a:r>
+              <a:rPr lang="ru-RU" dirty="0"/>
+              <a:t>типы каналов:</a:t>
+            </a:r>
+          </a:p>
+          <a:p>
+            <a:pPr lvl="1">
+              <a:buFont typeface="Arial" panose="020B0604020202020204" pitchFamily="34" charset="0"/>
+              <a:buChar char="•"/>
+            </a:pPr>
+            <a:r>
               <a:rPr lang="ru-RU" b="1" dirty="0"/>
-              <a:t>В чём главное отличие современных компьютерных сетей от классических сетей узкого назначения (например, старых телефонных или кабельного ТВ)?</a:t>
-            </a:r>
-            <a:endParaRPr lang="ru-RU" dirty="0"/>
-          </a:p>
-        </p:txBody>
-      </p:sp>
-      <p:sp>
-        <p:nvSpPr>
-          <p:cNvPr id="6" name="Объект 5"/>
-          <p:cNvSpPr>
-            <a:spLocks noGrp="1"/>
-          </p:cNvSpPr>
-          <p:nvPr>
-            <p:ph idx="1"/>
-          </p:nvPr>
-        </p:nvSpPr>
-        <p:spPr>
-          <a:xfrm>
-            <a:off x="657224" y="3822895"/>
-            <a:ext cx="10753725" cy="2463605"/>
-          </a:xfrm>
-        </p:spPr>
-        <p:txBody>
-          <a:bodyPr/>
-          <a:lstStyle/>
-          <a:p>
+              <a:t>Канал типа «запрос-ответ»:</a:t>
+            </a:r>
+            <a:r>
+              <a:rPr lang="ru-RU" dirty="0"/>
+              <a:t> используется приложениями, которые работают по принципу «клиент-сервер» (например, веб-браузер, запрашивающий страницу).</a:t>
+            </a:r>
+          </a:p>
+          <a:p>
+            <a:pPr lvl="1">
+              <a:buFont typeface="Arial" panose="020B0604020202020204" pitchFamily="34" charset="0"/>
+              <a:buChar char="•"/>
+            </a:pPr>
             <a:r>
               <a:rPr lang="ru-RU" b="1" dirty="0"/>
-              <a:t>А)</a:t>
+              <a:t>Потоковый канал</a:t>
             </a:r>
             <a:r>
               <a:rPr lang="ru-RU" dirty="0"/>
-              <a:t> Компьютерные сети работают исключительно без проводов.</a:t>
-            </a:r>
-          </a:p>
-          <a:p>
-            <a:r>
-              <a:rPr lang="ru-RU" b="1" dirty="0"/>
-              <a:t>Б)</a:t>
+              <a:t> используется приложениями, передающими непрерывные потоки данных (например, аудио или видео в реальном времени).</a:t>
+            </a:r>
+          </a:p>
+          <a:p>
+            <a:r>
+              <a:rPr lang="ru-RU" dirty="0" smtClean="0"/>
+              <a:t>Гибкость и универсальность:</a:t>
+            </a:r>
+          </a:p>
+          <a:p>
+            <a:pPr lvl="1">
+              <a:buFont typeface="Arial" panose="020B0604020202020204" pitchFamily="34" charset="0"/>
+              <a:buChar char="•"/>
+            </a:pPr>
+            <a:r>
+              <a:rPr lang="ru-RU" dirty="0" err="1"/>
+              <a:t>End-to-End</a:t>
             </a:r>
             <a:r>
               <a:rPr lang="ru-RU" dirty="0"/>
-              <a:t> Компьютерные сети универсальны и могут передавать множество различных типов данных для любых приложений.</a:t>
-            </a:r>
-          </a:p>
-          <a:p>
-            <a:r>
-              <a:rPr lang="ru-RU" b="1" dirty="0"/>
-              <a:t>В)</a:t>
+              <a:t> </a:t>
+            </a:r>
+            <a:r>
+              <a:rPr lang="ru-RU" dirty="0" err="1"/>
+              <a:t>Principle</a:t>
             </a:r>
             <a:r>
               <a:rPr lang="ru-RU" dirty="0"/>
-              <a:t> В компьютерных сетях каждый компьютер соединён со всеми остальными напрямую отдельным проводом.</a:t>
-            </a:r>
-          </a:p>
-          <a:p>
-            <a:r>
-              <a:rPr lang="ru-RU" b="1" dirty="0"/>
-              <a:t>Г)</a:t>
+              <a:t> (Сквозной принцип): интеллект на хостах, простота внутри сети.</a:t>
+            </a:r>
+          </a:p>
+          <a:p>
+            <a:pPr lvl="1">
+              <a:buFont typeface="Arial" panose="020B0604020202020204" pitchFamily="34" charset="0"/>
+              <a:buChar char="•"/>
+            </a:pPr>
+            <a:r>
+              <a:rPr lang="ru-RU" dirty="0" err="1"/>
+              <a:t>Hourglass</a:t>
             </a:r>
             <a:r>
               <a:rPr lang="ru-RU" dirty="0"/>
-              <a:t> Компьютерные сети оптимизированы только под передачу текста.</a:t>
-            </a:r>
+              <a:t> </a:t>
+            </a:r>
+            <a:r>
+              <a:rPr lang="ru-RU" dirty="0" err="1"/>
+              <a:t>Model</a:t>
+            </a:r>
+            <a:r>
+              <a:rPr lang="ru-RU" dirty="0"/>
+              <a:t> («Песочные часы» IP): единый тонкий межсетевой уровень для любого «железа» и любых программ.</a:t>
+            </a:r>
+          </a:p>
+          <a:p>
+            <a:endParaRPr lang="ru-RU" dirty="0" smtClean="0"/>
           </a:p>
           <a:p>
             <a:endParaRPr lang="ru-RU" dirty="0"/>
@@ -4163,7 +4089,7 @@
     </p:spTree>
     <p:extLst>
       <p:ext uri="{BB962C8B-B14F-4D97-AF65-F5344CB8AC3E}">
-        <p14:creationId xmlns:p14="http://schemas.microsoft.com/office/powerpoint/2010/main" val="3728645955"/>
+        <p14:creationId xmlns:p14="http://schemas.microsoft.com/office/powerpoint/2010/main" val="1473131457"/>
       </p:ext>
     </p:extLst>
   </p:cSld>
@@ -4200,102 +4126,219 @@
             <p:ph type="title"/>
           </p:nvPr>
         </p:nvSpPr>
+        <p:spPr/>
+        <p:txBody>
+          <a:bodyPr/>
+          <a:lstStyle/>
+          <a:p>
+            <a:r>
+              <a:rPr lang="ru-RU" dirty="0"/>
+              <a:t>Взгляд оператора: Эксплуатация сети</a:t>
+            </a:r>
+          </a:p>
+        </p:txBody>
+      </p:sp>
+      <p:sp>
+        <p:nvSpPr>
+          <p:cNvPr id="3" name="Объект 2"/>
+          <p:cNvSpPr>
+            <a:spLocks noGrp="1"/>
+          </p:cNvSpPr>
+          <p:nvPr>
+            <p:ph sz="half" idx="1"/>
+          </p:nvPr>
+        </p:nvSpPr>
         <p:spPr>
           <a:xfrm>
-            <a:off x="657224" y="1194125"/>
-            <a:ext cx="10772775" cy="1658198"/>
+            <a:off x="657224" y="1725571"/>
+            <a:ext cx="11080507" cy="3479475"/>
           </a:xfrm>
         </p:spPr>
         <p:txBody>
           <a:bodyPr>
-            <a:normAutofit fontScale="90000"/>
+            <a:noAutofit/>
           </a:bodyPr>
           <a:lstStyle/>
           <a:p>
             <a:r>
-              <a:rPr lang="ru-RU" b="1" dirty="0"/>
-              <a:t>Какой принцип передачи данных используется в подавляющем большинстве современных компьютерных сетей?</a:t>
-            </a:r>
-            <a:endParaRPr lang="ru-RU" dirty="0"/>
-          </a:p>
-        </p:txBody>
-      </p:sp>
-      <p:sp>
-        <p:nvSpPr>
-          <p:cNvPr id="3" name="Объект 2"/>
-          <p:cNvSpPr>
-            <a:spLocks noGrp="1"/>
-          </p:cNvSpPr>
-          <p:nvPr>
-            <p:ph idx="1"/>
-          </p:nvPr>
-        </p:nvSpPr>
-        <p:spPr>
-          <a:xfrm>
-            <a:off x="657224" y="3559126"/>
-            <a:ext cx="10753725" cy="2270174"/>
-          </a:xfrm>
-        </p:spPr>
-        <p:txBody>
-          <a:bodyPr/>
-          <a:lstStyle/>
-          <a:p>
-            <a:r>
-              <a:rPr lang="ru-RU" b="1" dirty="0"/>
-              <a:t>А)</a:t>
-            </a:r>
-            <a:r>
-              <a:rPr lang="ru-RU" dirty="0"/>
-              <a:t> Коммутация каналов (выделение и блокировка всей физической линии на всё время сеанса).</a:t>
-            </a:r>
-          </a:p>
-          <a:p>
-            <a:r>
-              <a:rPr lang="ru-RU" b="1" dirty="0"/>
-              <a:t>Б)</a:t>
-            </a:r>
-            <a:r>
-              <a:rPr lang="ru-RU" dirty="0"/>
-              <a:t> Коммутация пакетов со стратегией «</a:t>
-            </a:r>
-            <a:r>
-              <a:rPr lang="ru-RU" dirty="0" err="1"/>
-              <a:t>store-and-forward</a:t>
-            </a:r>
-            <a:r>
-              <a:rPr lang="ru-RU" dirty="0"/>
-              <a:t>» (сохрани и перешли).</a:t>
-            </a:r>
-          </a:p>
-          <a:p>
-            <a:r>
-              <a:rPr lang="ru-RU" b="1" dirty="0"/>
-              <a:t>В)</a:t>
-            </a:r>
-            <a:r>
-              <a:rPr lang="ru-RU" dirty="0"/>
-              <a:t> Передача единого непрерывного аналогового потока без разбиения.</a:t>
-            </a:r>
-          </a:p>
-          <a:p>
-            <a:r>
-              <a:rPr lang="ru-RU" b="1" dirty="0"/>
-              <a:t>Г)</a:t>
-            </a:r>
-            <a:r>
-              <a:rPr lang="ru-RU" dirty="0"/>
-              <a:t> Прямая трансляция без использования промежуточных узлов.</a:t>
-            </a:r>
-          </a:p>
-          <a:p>
-            <a:endParaRPr lang="ru-RU" dirty="0"/>
+              <a:rPr lang="ru-RU" sz="2800" dirty="0"/>
+              <a:t>Масштабируемость (</a:t>
+            </a:r>
+            <a:r>
+              <a:rPr lang="ru-RU" sz="2800" dirty="0" err="1"/>
+              <a:t>Scalability</a:t>
+            </a:r>
+            <a:r>
+              <a:rPr lang="ru-RU" sz="2800" dirty="0"/>
+              <a:t>):</a:t>
+            </a:r>
+          </a:p>
+          <a:p>
+            <a:pPr lvl="1">
+              <a:buFont typeface="Arial" panose="020B0604020202020204" pitchFamily="34" charset="0"/>
+              <a:buChar char="•"/>
+            </a:pPr>
+            <a:r>
+              <a:rPr lang="ru-RU" sz="2400" dirty="0"/>
+              <a:t>Стабильность метрик при росте </a:t>
+            </a:r>
+            <a:r>
+              <a:rPr lang="ru-RU" sz="2400" dirty="0" smtClean="0"/>
+              <a:t>сети.</a:t>
+            </a:r>
+          </a:p>
+          <a:p>
+            <a:r>
+              <a:rPr lang="ru-RU" sz="2800" dirty="0" smtClean="0"/>
+              <a:t>Простота </a:t>
+            </a:r>
+            <a:r>
+              <a:rPr lang="ru-RU" sz="2800" dirty="0"/>
+              <a:t>управления (</a:t>
+            </a:r>
+            <a:r>
+              <a:rPr lang="ru-RU" sz="2800" dirty="0" err="1"/>
+              <a:t>Ease</a:t>
+            </a:r>
+            <a:r>
+              <a:rPr lang="ru-RU" sz="2800" dirty="0"/>
+              <a:t> </a:t>
+            </a:r>
+            <a:r>
+              <a:rPr lang="ru-RU" sz="2800" dirty="0" err="1"/>
+              <a:t>of</a:t>
+            </a:r>
+            <a:r>
+              <a:rPr lang="ru-RU" sz="2800" dirty="0"/>
+              <a:t> </a:t>
+            </a:r>
+            <a:r>
+              <a:rPr lang="ru-RU" sz="2800" dirty="0" err="1"/>
+              <a:t>Management</a:t>
+            </a:r>
+            <a:r>
+              <a:rPr lang="ru-RU" sz="2800" dirty="0"/>
+              <a:t>):</a:t>
+            </a:r>
+          </a:p>
+          <a:p>
+            <a:pPr lvl="1">
+              <a:buFont typeface="Arial" panose="020B0604020202020204" pitchFamily="34" charset="0"/>
+              <a:buChar char="•"/>
+            </a:pPr>
+            <a:r>
+              <a:rPr lang="ru-RU" sz="2400" dirty="0"/>
+              <a:t>Централизованный и распределенный мониторинг.</a:t>
+            </a:r>
+          </a:p>
+          <a:p>
+            <a:pPr lvl="1">
+              <a:buFont typeface="Arial" panose="020B0604020202020204" pitchFamily="34" charset="0"/>
+              <a:buChar char="•"/>
+            </a:pPr>
+            <a:r>
+              <a:rPr lang="ru-RU" sz="2400" dirty="0"/>
+              <a:t>Быстрая локализация инцидентов и автоматизация конфигураций</a:t>
+            </a:r>
+            <a:r>
+              <a:rPr lang="ru-RU" sz="2400" dirty="0" smtClean="0"/>
+              <a:t>.</a:t>
+            </a:r>
+          </a:p>
+          <a:p>
+            <a:r>
+              <a:rPr lang="ru-RU" sz="2800" dirty="0"/>
+              <a:t>Безопасность (</a:t>
+            </a:r>
+            <a:r>
+              <a:rPr lang="ru-RU" sz="2800" dirty="0" err="1"/>
+              <a:t>Security</a:t>
+            </a:r>
+            <a:r>
+              <a:rPr lang="ru-RU" sz="2800" dirty="0"/>
+              <a:t>):</a:t>
+            </a:r>
+          </a:p>
+          <a:p>
+            <a:pPr lvl="1">
+              <a:buFont typeface="Arial" panose="020B0604020202020204" pitchFamily="34" charset="0"/>
+              <a:buChar char="•"/>
+            </a:pPr>
+            <a:r>
+              <a:rPr lang="ru-RU" sz="2800" dirty="0"/>
+              <a:t>Разграничение доступа (AAA).</a:t>
+            </a:r>
+          </a:p>
+          <a:p>
+            <a:pPr lvl="1">
+              <a:buFont typeface="Arial" panose="020B0604020202020204" pitchFamily="34" charset="0"/>
+              <a:buChar char="•"/>
+            </a:pPr>
+            <a:r>
+              <a:rPr lang="ru-RU" sz="2800" dirty="0"/>
+              <a:t>Защита инфраструктуры от </a:t>
+            </a:r>
+            <a:r>
+              <a:rPr lang="ru-RU" sz="2800" dirty="0" err="1"/>
+              <a:t>DDoS</a:t>
+            </a:r>
+            <a:r>
+              <a:rPr lang="ru-RU" sz="2800" dirty="0"/>
+              <a:t> и атак на протоколы маршрутизации.</a:t>
+            </a:r>
+          </a:p>
+          <a:p>
+            <a:r>
+              <a:rPr lang="ru-RU" sz="2800" dirty="0"/>
+              <a:t>Адаптивность (</a:t>
+            </a:r>
+            <a:r>
+              <a:rPr lang="ru-RU" sz="2800" dirty="0" err="1"/>
+              <a:t>Evolvability</a:t>
+            </a:r>
+            <a:r>
+              <a:rPr lang="ru-RU" sz="2800" dirty="0"/>
+              <a:t>):</a:t>
+            </a:r>
+          </a:p>
+          <a:p>
+            <a:pPr lvl="1">
+              <a:buFont typeface="Arial" panose="020B0604020202020204" pitchFamily="34" charset="0"/>
+              <a:buChar char="•"/>
+            </a:pPr>
+            <a:r>
+              <a:rPr lang="ru-RU" sz="2800" dirty="0"/>
+              <a:t>Замена узлов и стандартов без остановки сети (</a:t>
+            </a:r>
+            <a:r>
+              <a:rPr lang="ru-RU" sz="2800" dirty="0" err="1"/>
+              <a:t>backward</a:t>
+            </a:r>
+            <a:r>
+              <a:rPr lang="ru-RU" sz="2800" dirty="0"/>
+              <a:t> </a:t>
+            </a:r>
+            <a:r>
+              <a:rPr lang="ru-RU" sz="2800" dirty="0" err="1"/>
+              <a:t>compatibility</a:t>
+            </a:r>
+            <a:r>
+              <a:rPr lang="ru-RU" sz="2800" dirty="0"/>
+              <a:t>).</a:t>
+            </a:r>
+          </a:p>
+          <a:p>
+            <a:pPr marL="4572" lvl="1" indent="0">
+              <a:buNone/>
+            </a:pPr>
+            <a:endParaRPr lang="ru-RU" sz="3200" dirty="0"/>
           </a:p>
         </p:txBody>
       </p:sp>
     </p:spTree>
     <p:extLst>
       <p:ext uri="{BB962C8B-B14F-4D97-AF65-F5344CB8AC3E}">
-        <p14:creationId xmlns:p14="http://schemas.microsoft.com/office/powerpoint/2010/main" val="824283284"/>
+        <p14:creationId xmlns:p14="http://schemas.microsoft.com/office/powerpoint/2010/main" val="824875538"/>
       </p:ext>
     </p:extLst>
   </p:cSld>
@@ -4324,7 +4367,7 @@
       </p:grpSpPr>
       <p:sp>
         <p:nvSpPr>
-          <p:cNvPr id="2" name="Заголовок 1"/>
+          <p:cNvPr id="5" name="Заголовок 4"/>
           <p:cNvSpPr>
             <a:spLocks noGrp="1"/>
           </p:cNvSpPr>
@@ -4334,8 +4377,8 @@
         </p:nvSpPr>
         <p:spPr>
           <a:xfrm>
-            <a:off x="657224" y="1220503"/>
-            <a:ext cx="10772775" cy="1658198"/>
+            <a:off x="657224" y="499533"/>
+            <a:ext cx="10772775" cy="3534378"/>
           </a:xfrm>
         </p:spPr>
         <p:txBody>
@@ -4346,7 +4389,7 @@
           <a:p>
             <a:r>
               <a:rPr lang="ru-RU" b="1" dirty="0"/>
-              <a:t>Представьте устройство, которое объединяет между собой две или более независимые сети (разные «облака») и пересылает пакеты из одной сети в другую. Как оно называется?</a:t>
+              <a:t>В чём главное отличие современных компьютерных сетей от классических сетей узкого назначения (например, старых телефонных или кабельного ТВ)?</a:t>
             </a:r>
             <a:endParaRPr lang="ru-RU" dirty="0"/>
           </a:p>
@@ -4354,7 +4397,7 @@
       </p:sp>
       <p:sp>
         <p:nvSpPr>
-          <p:cNvPr id="3" name="Объект 2"/>
+          <p:cNvPr id="6" name="Объект 5"/>
           <p:cNvSpPr>
             <a:spLocks noGrp="1"/>
           </p:cNvSpPr>
@@ -4364,8 +4407,8 @@
         </p:nvSpPr>
         <p:spPr>
           <a:xfrm>
-            <a:off x="657224" y="3963573"/>
-            <a:ext cx="10753725" cy="2032782"/>
+            <a:off x="657224" y="3822895"/>
+            <a:ext cx="10753725" cy="2463605"/>
           </a:xfrm>
         </p:spPr>
         <p:txBody>
@@ -4378,7 +4421,7 @@
             </a:r>
             <a:r>
               <a:rPr lang="ru-RU" dirty="0"/>
-              <a:t> Хост (оконечный узел)</a:t>
+              <a:t> Компьютерные сети работают исключительно без проводов.</a:t>
             </a:r>
           </a:p>
           <a:p>
@@ -4388,7 +4431,7 @@
             </a:r>
             <a:r>
               <a:rPr lang="ru-RU" dirty="0"/>
-              <a:t> Маршрутизатор (шлюз)</a:t>
+              <a:t> Компьютерные сети универсальны и могут передавать множество различных типов данных для любых приложений.</a:t>
             </a:r>
           </a:p>
           <a:p>
@@ -4398,7 +4441,7 @@
             </a:r>
             <a:r>
               <a:rPr lang="ru-RU" dirty="0"/>
-              <a:t> Сетевой кабель</a:t>
+              <a:t> В компьютерных сетях каждый компьютер соединён со всеми остальными напрямую отдельным проводом.</a:t>
             </a:r>
           </a:p>
           <a:p>
@@ -4408,7 +4451,7 @@
             </a:r>
             <a:r>
               <a:rPr lang="ru-RU" dirty="0"/>
-              <a:t> Периферийное устройство</a:t>
+              <a:t> Компьютерные сети оптимизированы только под передачу текста.</a:t>
             </a:r>
           </a:p>
           <a:p>
@@ -4419,7 +4462,7 @@
     </p:spTree>
     <p:extLst>
       <p:ext uri="{BB962C8B-B14F-4D97-AF65-F5344CB8AC3E}">
-        <p14:creationId xmlns:p14="http://schemas.microsoft.com/office/powerpoint/2010/main" val="2809661286"/>
+        <p14:creationId xmlns:p14="http://schemas.microsoft.com/office/powerpoint/2010/main" val="3728645955"/>
       </p:ext>
     </p:extLst>
   </p:cSld>
@@ -4458,7 +4501,7 @@
         </p:nvSpPr>
         <p:spPr>
           <a:xfrm>
-            <a:off x="657224" y="1352387"/>
+            <a:off x="657224" y="1194125"/>
             <a:ext cx="10772775" cy="1658198"/>
           </a:xfrm>
         </p:spPr>
@@ -4470,7 +4513,7 @@
           <a:p>
             <a:r>
               <a:rPr lang="ru-RU" b="1" dirty="0"/>
-              <a:t>Как называется процесс определения промежуточными узлами оптимального пути для пересылки сообщения получателю на основе его сетевого адреса?</a:t>
+              <a:t>Какой принцип передачи данных используется в подавляющем большинстве современных компьютерных сетей?</a:t>
             </a:r>
             <a:endParaRPr lang="ru-RU" dirty="0"/>
           </a:p>
@@ -4488,8 +4531,8 @@
         </p:nvSpPr>
         <p:spPr>
           <a:xfrm>
-            <a:off x="657224" y="4086665"/>
-            <a:ext cx="10753725" cy="1962443"/>
+            <a:off x="657224" y="3559126"/>
+            <a:ext cx="10753725" cy="2270174"/>
           </a:xfrm>
         </p:spPr>
         <p:txBody>
@@ -4502,13 +4545,8 @@
             </a:r>
             <a:r>
               <a:rPr lang="ru-RU" dirty="0"/>
-              <a:t> </a:t>
-            </a:r>
-            <a:r>
-              <a:rPr lang="ru-RU" dirty="0" err="1"/>
-              <a:t>Стриминг</a:t>
-            </a:r>
-            <a:endParaRPr lang="ru-RU" dirty="0"/>
+              <a:t> Коммутация каналов (выделение и блокировка всей физической линии на всё время сеанса).</a:t>
+            </a:r>
           </a:p>
           <a:p>
             <a:r>
@@ -4517,7 +4555,15 @@
             </a:r>
             <a:r>
               <a:rPr lang="ru-RU" dirty="0"/>
-              <a:t> Буферизация</a:t>
+              <a:t> Коммутация пакетов со стратегией «</a:t>
+            </a:r>
+            <a:r>
+              <a:rPr lang="ru-RU" dirty="0" err="1"/>
+              <a:t>store-and-forward</a:t>
+            </a:r>
+            <a:r>
+              <a:rPr lang="ru-RU" dirty="0"/>
+              <a:t>» (сохрани и перешли).</a:t>
             </a:r>
           </a:p>
           <a:p>
@@ -4527,7 +4573,7 @@
             </a:r>
             <a:r>
               <a:rPr lang="ru-RU" dirty="0"/>
-              <a:t> Маршрутизация</a:t>
+              <a:t> Передача единого непрерывного аналогового потока без разбиения.</a:t>
             </a:r>
           </a:p>
           <a:p>
@@ -4537,7 +4583,7 @@
             </a:r>
             <a:r>
               <a:rPr lang="ru-RU" dirty="0"/>
-              <a:t> Коммутация каналов</a:t>
+              <a:t> Прямая трансляция без использования промежуточных узлов.</a:t>
             </a:r>
           </a:p>
           <a:p>
@@ -4548,7 +4594,7 @@
     </p:spTree>
     <p:extLst>
       <p:ext uri="{BB962C8B-B14F-4D97-AF65-F5344CB8AC3E}">
-        <p14:creationId xmlns:p14="http://schemas.microsoft.com/office/powerpoint/2010/main" val="194880721"/>
+        <p14:creationId xmlns:p14="http://schemas.microsoft.com/office/powerpoint/2010/main" val="824283284"/>
       </p:ext>
     </p:extLst>
   </p:cSld>
@@ -4587,6 +4633,259 @@
         </p:nvSpPr>
         <p:spPr>
           <a:xfrm>
+            <a:off x="657224" y="1220503"/>
+            <a:ext cx="10772775" cy="1658198"/>
+          </a:xfrm>
+        </p:spPr>
+        <p:txBody>
+          <a:bodyPr>
+            <a:normAutofit fontScale="90000"/>
+          </a:bodyPr>
+          <a:lstStyle/>
+          <a:p>
+            <a:r>
+              <a:rPr lang="ru-RU" b="1" dirty="0"/>
+              <a:t>Представьте устройство, которое объединяет между собой две или более независимые сети (разные «облака») и пересылает пакеты из одной сети в другую. Как оно называется?</a:t>
+            </a:r>
+            <a:endParaRPr lang="ru-RU" dirty="0"/>
+          </a:p>
+        </p:txBody>
+      </p:sp>
+      <p:sp>
+        <p:nvSpPr>
+          <p:cNvPr id="3" name="Объект 2"/>
+          <p:cNvSpPr>
+            <a:spLocks noGrp="1"/>
+          </p:cNvSpPr>
+          <p:nvPr>
+            <p:ph idx="1"/>
+          </p:nvPr>
+        </p:nvSpPr>
+        <p:spPr>
+          <a:xfrm>
+            <a:off x="657224" y="3963573"/>
+            <a:ext cx="10753725" cy="2032782"/>
+          </a:xfrm>
+        </p:spPr>
+        <p:txBody>
+          <a:bodyPr/>
+          <a:lstStyle/>
+          <a:p>
+            <a:r>
+              <a:rPr lang="ru-RU" b="1" dirty="0"/>
+              <a:t>А)</a:t>
+            </a:r>
+            <a:r>
+              <a:rPr lang="ru-RU" dirty="0"/>
+              <a:t> Хост (оконечный узел)</a:t>
+            </a:r>
+          </a:p>
+          <a:p>
+            <a:r>
+              <a:rPr lang="ru-RU" b="1" dirty="0"/>
+              <a:t>Б)</a:t>
+            </a:r>
+            <a:r>
+              <a:rPr lang="ru-RU" dirty="0"/>
+              <a:t> Маршрутизатор (шлюз)</a:t>
+            </a:r>
+          </a:p>
+          <a:p>
+            <a:r>
+              <a:rPr lang="ru-RU" b="1" dirty="0"/>
+              <a:t>В)</a:t>
+            </a:r>
+            <a:r>
+              <a:rPr lang="ru-RU" dirty="0"/>
+              <a:t> Сетевой кабель</a:t>
+            </a:r>
+          </a:p>
+          <a:p>
+            <a:r>
+              <a:rPr lang="ru-RU" b="1" dirty="0"/>
+              <a:t>Г)</a:t>
+            </a:r>
+            <a:r>
+              <a:rPr lang="ru-RU" dirty="0"/>
+              <a:t> Периферийное устройство</a:t>
+            </a:r>
+          </a:p>
+          <a:p>
+            <a:endParaRPr lang="ru-RU" dirty="0"/>
+          </a:p>
+        </p:txBody>
+      </p:sp>
+    </p:spTree>
+    <p:extLst>
+      <p:ext uri="{BB962C8B-B14F-4D97-AF65-F5344CB8AC3E}">
+        <p14:creationId xmlns:p14="http://schemas.microsoft.com/office/powerpoint/2010/main" val="2809661286"/>
+      </p:ext>
+    </p:extLst>
+  </p:cSld>
+  <p:clrMapOvr>
+    <a:masterClrMapping/>
+  </p:clrMapOvr>
+</p:sld>
+</file>
+
+<file path=ppt/slides/slide18.xml><?xml version="1.0" encoding="utf-8"?>
+<p:sld xmlns:a="http://schemas.openxmlformats.org/drawingml/2006/main" xmlns:r="http://schemas.openxmlformats.org/officeDocument/2006/relationships" xmlns:p="http://schemas.openxmlformats.org/presentationml/2006/main">
+  <p:cSld>
+    <p:spTree>
+      <p:nvGrpSpPr>
+        <p:cNvPr id="1" name=""/>
+        <p:cNvGrpSpPr/>
+        <p:nvPr/>
+      </p:nvGrpSpPr>
+      <p:grpSpPr>
+        <a:xfrm>
+          <a:off x="0" y="0"/>
+          <a:ext cx="0" cy="0"/>
+          <a:chOff x="0" y="0"/>
+          <a:chExt cx="0" cy="0"/>
+        </a:xfrm>
+      </p:grpSpPr>
+      <p:sp>
+        <p:nvSpPr>
+          <p:cNvPr id="2" name="Заголовок 1"/>
+          <p:cNvSpPr>
+            <a:spLocks noGrp="1"/>
+          </p:cNvSpPr>
+          <p:nvPr>
+            <p:ph type="title"/>
+          </p:nvPr>
+        </p:nvSpPr>
+        <p:spPr>
+          <a:xfrm>
+            <a:off x="657224" y="1352387"/>
+            <a:ext cx="10772775" cy="1658198"/>
+          </a:xfrm>
+        </p:spPr>
+        <p:txBody>
+          <a:bodyPr>
+            <a:normAutofit fontScale="90000"/>
+          </a:bodyPr>
+          <a:lstStyle/>
+          <a:p>
+            <a:r>
+              <a:rPr lang="ru-RU" b="1" dirty="0"/>
+              <a:t>Как называется процесс определения промежуточными узлами оптимального пути для пересылки сообщения получателю на основе его сетевого адреса?</a:t>
+            </a:r>
+            <a:endParaRPr lang="ru-RU" dirty="0"/>
+          </a:p>
+        </p:txBody>
+      </p:sp>
+      <p:sp>
+        <p:nvSpPr>
+          <p:cNvPr id="3" name="Объект 2"/>
+          <p:cNvSpPr>
+            <a:spLocks noGrp="1"/>
+          </p:cNvSpPr>
+          <p:nvPr>
+            <p:ph idx="1"/>
+          </p:nvPr>
+        </p:nvSpPr>
+        <p:spPr>
+          <a:xfrm>
+            <a:off x="657224" y="4086665"/>
+            <a:ext cx="10753725" cy="1962443"/>
+          </a:xfrm>
+        </p:spPr>
+        <p:txBody>
+          <a:bodyPr/>
+          <a:lstStyle/>
+          <a:p>
+            <a:r>
+              <a:rPr lang="ru-RU" b="1" dirty="0"/>
+              <a:t>А)</a:t>
+            </a:r>
+            <a:r>
+              <a:rPr lang="ru-RU" dirty="0"/>
+              <a:t> </a:t>
+            </a:r>
+            <a:r>
+              <a:rPr lang="ru-RU" dirty="0" err="1"/>
+              <a:t>Стриминг</a:t>
+            </a:r>
+            <a:endParaRPr lang="ru-RU" dirty="0"/>
+          </a:p>
+          <a:p>
+            <a:r>
+              <a:rPr lang="ru-RU" b="1" dirty="0"/>
+              <a:t>Б)</a:t>
+            </a:r>
+            <a:r>
+              <a:rPr lang="ru-RU" dirty="0"/>
+              <a:t> Буферизация</a:t>
+            </a:r>
+          </a:p>
+          <a:p>
+            <a:r>
+              <a:rPr lang="ru-RU" b="1" dirty="0"/>
+              <a:t>В)</a:t>
+            </a:r>
+            <a:r>
+              <a:rPr lang="ru-RU" dirty="0"/>
+              <a:t> Маршрутизация</a:t>
+            </a:r>
+          </a:p>
+          <a:p>
+            <a:r>
+              <a:rPr lang="ru-RU" b="1" dirty="0"/>
+              <a:t>Г)</a:t>
+            </a:r>
+            <a:r>
+              <a:rPr lang="ru-RU" dirty="0"/>
+              <a:t> Коммутация каналов</a:t>
+            </a:r>
+          </a:p>
+          <a:p>
+            <a:endParaRPr lang="ru-RU" dirty="0"/>
+          </a:p>
+        </p:txBody>
+      </p:sp>
+    </p:spTree>
+    <p:extLst>
+      <p:ext uri="{BB962C8B-B14F-4D97-AF65-F5344CB8AC3E}">
+        <p14:creationId xmlns:p14="http://schemas.microsoft.com/office/powerpoint/2010/main" val="194880721"/>
+      </p:ext>
+    </p:extLst>
+  </p:cSld>
+  <p:clrMapOvr>
+    <a:masterClrMapping/>
+  </p:clrMapOvr>
+</p:sld>
+</file>
+
+<file path=ppt/slides/slide19.xml><?xml version="1.0" encoding="utf-8"?>
+<p:sld xmlns:a="http://schemas.openxmlformats.org/drawingml/2006/main" xmlns:r="http://schemas.openxmlformats.org/officeDocument/2006/relationships" xmlns:p="http://schemas.openxmlformats.org/presentationml/2006/main">
+  <p:cSld>
+    <p:spTree>
+      <p:nvGrpSpPr>
+        <p:cNvPr id="1" name=""/>
+        <p:cNvGrpSpPr/>
+        <p:nvPr/>
+      </p:nvGrpSpPr>
+      <p:grpSpPr>
+        <a:xfrm>
+          <a:off x="0" y="0"/>
+          <a:ext cx="0" cy="0"/>
+          <a:chOff x="0" y="0"/>
+          <a:chExt cx="0" cy="0"/>
+        </a:xfrm>
+      </p:grpSpPr>
+      <p:sp>
+        <p:nvSpPr>
+          <p:cNvPr id="2" name="Заголовок 1"/>
+          <p:cNvSpPr>
+            <a:spLocks noGrp="1"/>
+          </p:cNvSpPr>
+          <p:nvPr>
+            <p:ph type="title"/>
+          </p:nvPr>
+        </p:nvSpPr>
+        <p:spPr>
+          <a:xfrm>
             <a:off x="657224" y="1071033"/>
             <a:ext cx="10772775" cy="1658198"/>
           </a:xfrm>
@@ -4698,7 +4997,144 @@
 </p:sld>
 </file>
 
-<file path=ppt/slides/slide18.xml><?xml version="1.0" encoding="utf-8"?>
+<file path=ppt/slides/slide2.xml><?xml version="1.0" encoding="utf-8"?>
+<p:sld xmlns:a="http://schemas.openxmlformats.org/drawingml/2006/main" xmlns:r="http://schemas.openxmlformats.org/officeDocument/2006/relationships" xmlns:p="http://schemas.openxmlformats.org/presentationml/2006/main">
+  <p:cSld>
+    <p:spTree>
+      <p:nvGrpSpPr>
+        <p:cNvPr id="1" name=""/>
+        <p:cNvGrpSpPr/>
+        <p:nvPr/>
+      </p:nvGrpSpPr>
+      <p:grpSpPr>
+        <a:xfrm>
+          <a:off x="0" y="0"/>
+          <a:ext cx="0" cy="0"/>
+          <a:chOff x="0" y="0"/>
+          <a:chExt cx="0" cy="0"/>
+        </a:xfrm>
+      </p:grpSpPr>
+      <p:sp>
+        <p:nvSpPr>
+          <p:cNvPr id="2" name="Заголовок 1"/>
+          <p:cNvSpPr>
+            <a:spLocks noGrp="1"/>
+          </p:cNvSpPr>
+          <p:nvPr>
+            <p:ph type="title"/>
+          </p:nvPr>
+        </p:nvSpPr>
+        <p:spPr/>
+        <p:txBody>
+          <a:bodyPr/>
+          <a:lstStyle/>
+          <a:p>
+            <a:r>
+              <a:rPr lang="ru-RU" dirty="0"/>
+              <a:t>Компьютерная сеть и её главное свойство</a:t>
+            </a:r>
+          </a:p>
+        </p:txBody>
+      </p:sp>
+      <p:sp>
+        <p:nvSpPr>
+          <p:cNvPr id="3" name="Объект 2"/>
+          <p:cNvSpPr>
+            <a:spLocks noGrp="1"/>
+          </p:cNvSpPr>
+          <p:nvPr>
+            <p:ph idx="1"/>
+          </p:nvPr>
+        </p:nvSpPr>
+        <p:spPr>
+          <a:xfrm>
+            <a:off x="676657" y="2011680"/>
+            <a:ext cx="10753342" cy="1589649"/>
+          </a:xfrm>
+        </p:spPr>
+        <p:txBody>
+          <a:bodyPr>
+            <a:normAutofit/>
+          </a:bodyPr>
+          <a:lstStyle/>
+          <a:p>
+            <a:r>
+              <a:rPr lang="ru-RU" sz="3200" b="1" dirty="0"/>
+              <a:t>Компьютерная сеть — совокупность независимых вычислительных устройств, соединённых каналами связи</a:t>
+            </a:r>
+            <a:r>
+              <a:rPr lang="ru-RU" sz="3200" b="1" dirty="0" smtClean="0"/>
+              <a:t>.</a:t>
+            </a:r>
+            <a:endParaRPr lang="en-US" sz="3200" b="1" dirty="0" smtClean="0"/>
+          </a:p>
+          <a:p>
+            <a:endParaRPr lang="ru-RU" sz="3600" b="1" dirty="0"/>
+          </a:p>
+        </p:txBody>
+      </p:sp>
+      <p:pic>
+        <p:nvPicPr>
+          <p:cNvPr id="4" name="Рисунок 3"/>
+          <p:cNvPicPr>
+            <a:picLocks noChangeAspect="1"/>
+          </p:cNvPicPr>
+          <p:nvPr/>
+        </p:nvPicPr>
+        <p:blipFill>
+          <a:blip r:embed="rId2"/>
+          <a:stretch>
+            <a:fillRect/>
+          </a:stretch>
+        </p:blipFill>
+        <p:spPr>
+          <a:xfrm>
+            <a:off x="276165" y="3209639"/>
+            <a:ext cx="5535461" cy="3276777"/>
+          </a:xfrm>
+          <a:prstGeom prst="rect">
+            <a:avLst/>
+          </a:prstGeom>
+        </p:spPr>
+      </p:pic>
+      <p:pic>
+        <p:nvPicPr>
+          <p:cNvPr id="5" name="Рисунок 4"/>
+          <p:cNvPicPr>
+            <a:picLocks noChangeAspect="1"/>
+          </p:cNvPicPr>
+          <p:nvPr/>
+        </p:nvPicPr>
+        <p:blipFill>
+          <a:blip r:embed="rId3"/>
+          <a:stretch>
+            <a:fillRect/>
+          </a:stretch>
+        </p:blipFill>
+        <p:spPr>
+          <a:xfrm>
+            <a:off x="5811626" y="3226777"/>
+            <a:ext cx="6022820" cy="3242502"/>
+          </a:xfrm>
+          <a:prstGeom prst="rect">
+            <a:avLst/>
+          </a:prstGeom>
+        </p:spPr>
+      </p:pic>
+    </p:spTree>
+    <p:extLst>
+      <p:ext uri="{BB962C8B-B14F-4D97-AF65-F5344CB8AC3E}">
+        <p14:creationId xmlns:p14="http://schemas.microsoft.com/office/powerpoint/2010/main" val="1750085207"/>
+      </p:ext>
+    </p:extLst>
+  </p:cSld>
+  <p:clrMapOvr>
+    <a:masterClrMapping/>
+  </p:clrMapOvr>
+</p:sld>
+</file>
+
+<file path=ppt/slides/slide20.xml><?xml version="1.0" encoding="utf-8"?>
 <p:sld xmlns:a="http://schemas.openxmlformats.org/drawingml/2006/main" xmlns:r="http://schemas.openxmlformats.org/officeDocument/2006/relationships" xmlns:p="http://schemas.openxmlformats.org/presentationml/2006/main">
   <p:cSld>
     <p:spTree>
@@ -5410,7 +5846,7 @@
 </p:sld>
 </file>
 
-<file path=ppt/slides/slide19.xml><?xml version="1.0" encoding="utf-8"?>
+<file path=ppt/slides/slide21.xml><?xml version="1.0" encoding="utf-8"?>
 <p:sld xmlns:a="http://schemas.openxmlformats.org/drawingml/2006/main" xmlns:r="http://schemas.openxmlformats.org/officeDocument/2006/relationships" xmlns:p="http://schemas.openxmlformats.org/presentationml/2006/main">
   <p:cSld>
     <p:spTree>
@@ -5548,7 +5984,7 @@
 </p:sld>
 </file>
 
-<file path=ppt/slides/slide2.xml><?xml version="1.0" encoding="utf-8"?>
+<file path=ppt/slides/slide22.xml><?xml version="1.0" encoding="utf-8"?>
 <p:sld xmlns:a="http://schemas.openxmlformats.org/drawingml/2006/main" xmlns:r="http://schemas.openxmlformats.org/officeDocument/2006/relationships" xmlns:p="http://schemas.openxmlformats.org/presentationml/2006/main">
   <p:cSld>
     <p:spTree>
@@ -5575,143 +6011,6 @@
             <p:ph type="title"/>
           </p:nvPr>
         </p:nvSpPr>
-        <p:spPr/>
-        <p:txBody>
-          <a:bodyPr/>
-          <a:lstStyle/>
-          <a:p>
-            <a:r>
-              <a:rPr lang="ru-RU" dirty="0"/>
-              <a:t>Компьютерная сеть и её главное свойство</a:t>
-            </a:r>
-          </a:p>
-        </p:txBody>
-      </p:sp>
-      <p:sp>
-        <p:nvSpPr>
-          <p:cNvPr id="3" name="Объект 2"/>
-          <p:cNvSpPr>
-            <a:spLocks noGrp="1"/>
-          </p:cNvSpPr>
-          <p:nvPr>
-            <p:ph idx="1"/>
-          </p:nvPr>
-        </p:nvSpPr>
-        <p:spPr>
-          <a:xfrm>
-            <a:off x="676657" y="2011680"/>
-            <a:ext cx="10753342" cy="1589649"/>
-          </a:xfrm>
-        </p:spPr>
-        <p:txBody>
-          <a:bodyPr>
-            <a:normAutofit/>
-          </a:bodyPr>
-          <a:lstStyle/>
-          <a:p>
-            <a:r>
-              <a:rPr lang="ru-RU" sz="3200" b="1" dirty="0"/>
-              <a:t>Компьютерная сеть — совокупность независимых вычислительных устройств, соединённых каналами связи</a:t>
-            </a:r>
-            <a:r>
-              <a:rPr lang="ru-RU" sz="3200" b="1" dirty="0" smtClean="0"/>
-              <a:t>.</a:t>
-            </a:r>
-            <a:endParaRPr lang="en-US" sz="3200" b="1" dirty="0" smtClean="0"/>
-          </a:p>
-          <a:p>
-            <a:endParaRPr lang="ru-RU" sz="3600" b="1" dirty="0"/>
-          </a:p>
-        </p:txBody>
-      </p:sp>
-      <p:pic>
-        <p:nvPicPr>
-          <p:cNvPr id="4" name="Рисунок 3"/>
-          <p:cNvPicPr>
-            <a:picLocks noChangeAspect="1"/>
-          </p:cNvPicPr>
-          <p:nvPr/>
-        </p:nvPicPr>
-        <p:blipFill>
-          <a:blip r:embed="rId2"/>
-          <a:stretch>
-            <a:fillRect/>
-          </a:stretch>
-        </p:blipFill>
-        <p:spPr>
-          <a:xfrm>
-            <a:off x="276165" y="3209639"/>
-            <a:ext cx="5535461" cy="3276777"/>
-          </a:xfrm>
-          <a:prstGeom prst="rect">
-            <a:avLst/>
-          </a:prstGeom>
-        </p:spPr>
-      </p:pic>
-      <p:pic>
-        <p:nvPicPr>
-          <p:cNvPr id="5" name="Рисунок 4"/>
-          <p:cNvPicPr>
-            <a:picLocks noChangeAspect="1"/>
-          </p:cNvPicPr>
-          <p:nvPr/>
-        </p:nvPicPr>
-        <p:blipFill>
-          <a:blip r:embed="rId3"/>
-          <a:stretch>
-            <a:fillRect/>
-          </a:stretch>
-        </p:blipFill>
-        <p:spPr>
-          <a:xfrm>
-            <a:off x="5811626" y="3226777"/>
-            <a:ext cx="6022820" cy="3242502"/>
-          </a:xfrm>
-          <a:prstGeom prst="rect">
-            <a:avLst/>
-          </a:prstGeom>
-        </p:spPr>
-      </p:pic>
-    </p:spTree>
-    <p:extLst>
-      <p:ext uri="{BB962C8B-B14F-4D97-AF65-F5344CB8AC3E}">
-        <p14:creationId xmlns:p14="http://schemas.microsoft.com/office/powerpoint/2010/main" val="1750085207"/>
-      </p:ext>
-    </p:extLst>
-  </p:cSld>
-  <p:clrMapOvr>
-    <a:masterClrMapping/>
-  </p:clrMapOvr>
-</p:sld>
-</file>
-
-<file path=ppt/slides/slide20.xml><?xml version="1.0" encoding="utf-8"?>
-<p:sld xmlns:a="http://schemas.openxmlformats.org/drawingml/2006/main" xmlns:r="http://schemas.openxmlformats.org/officeDocument/2006/relationships" xmlns:p="http://schemas.openxmlformats.org/presentationml/2006/main">
-  <p:cSld>
-    <p:spTree>
-      <p:nvGrpSpPr>
-        <p:cNvPr id="1" name=""/>
-        <p:cNvGrpSpPr/>
-        <p:nvPr/>
-      </p:nvGrpSpPr>
-      <p:grpSpPr>
-        <a:xfrm>
-          <a:off x="0" y="0"/>
-          <a:ext cx="0" cy="0"/>
-          <a:chOff x="0" y="0"/>
-          <a:chExt cx="0" cy="0"/>
-        </a:xfrm>
-      </p:grpSpPr>
-      <p:sp>
-        <p:nvSpPr>
-          <p:cNvPr id="2" name="Заголовок 1"/>
-          <p:cNvSpPr>
-            <a:spLocks noGrp="1"/>
-          </p:cNvSpPr>
-          <p:nvPr>
-            <p:ph type="title"/>
-          </p:nvPr>
-        </p:nvSpPr>
         <p:spPr>
           <a:xfrm>
             <a:off x="676656" y="1053448"/>
@@ -5744,7 +6043,6 @@
               <a:rPr lang="ru-RU" dirty="0"/>
               <a:t>) лучше подходит для каждого случая?</a:t>
             </a:r>
-            <a:endParaRPr lang="ru-RU" dirty="0"/>
           </a:p>
         </p:txBody>
       </p:sp>
@@ -5815,7 +6113,7 @@
 </p:sld>
 </file>
 
-<file path=ppt/slides/slide21.xml><?xml version="1.0" encoding="utf-8"?>
+<file path=ppt/slides/slide23.xml><?xml version="1.0" encoding="utf-8"?>
 <p:sld xmlns:a="http://schemas.openxmlformats.org/drawingml/2006/main" xmlns:r="http://schemas.openxmlformats.org/officeDocument/2006/relationships" xmlns:p="http://schemas.openxmlformats.org/presentationml/2006/main">
   <p:cSld>
     <p:spTree>
@@ -6633,149 +6931,107 @@
           <a:lstStyle/>
           <a:p>
             <a:r>
-              <a:rPr lang="ru-RU" dirty="0"/>
-              <a:t>Классы сетевых приложений и требования к сети</a:t>
-            </a:r>
-          </a:p>
-        </p:txBody>
-      </p:sp>
-      <p:sp>
-        <p:nvSpPr>
-          <p:cNvPr id="3" name="Объект 2"/>
-          <p:cNvSpPr>
-            <a:spLocks noGrp="1"/>
-          </p:cNvSpPr>
+              <a:rPr lang="ru-RU" dirty="0" smtClean="0"/>
+              <a:t>Всемирная паутина </a:t>
+            </a:r>
+            <a:r>
+              <a:rPr lang="en-US" dirty="0"/>
+              <a:t>(World Wide Web)</a:t>
+            </a:r>
+            <a:endParaRPr lang="ru-RU" dirty="0"/>
+          </a:p>
+        </p:txBody>
+      </p:sp>
+      <p:pic>
+        <p:nvPicPr>
+          <p:cNvPr id="1026" name="Picture 2" descr="What is WWW? Difference between WWW and Internet"/>
+          <p:cNvPicPr>
+            <a:picLocks noGrp="1" noChangeAspect="1" noChangeArrowheads="1"/>
+          </p:cNvPicPr>
+          <p:nvPr>
+            <p:ph sz="half" idx="2"/>
+          </p:nvPr>
+        </p:nvPicPr>
+        <p:blipFill>
+          <a:blip r:embed="rId2">
+            <a:extLst>
+              <a:ext uri="{28A0092B-C50C-407E-A947-70E740481C1C}">
+                <a14:useLocalDpi xmlns:a14="http://schemas.microsoft.com/office/drawing/2010/main" val="0"/>
+              </a:ext>
+            </a:extLst>
+          </a:blip>
+          <a:srcRect/>
+          <a:stretch>
+            <a:fillRect/>
+          </a:stretch>
+        </p:blipFill>
+        <p:spPr bwMode="auto">
+          <a:xfrm>
+            <a:off x="6011863" y="2550092"/>
+            <a:ext cx="4662487" cy="2664278"/>
+          </a:xfrm>
+          <a:prstGeom prst="rect">
+            <a:avLst/>
+          </a:prstGeom>
+          <a:noFill/>
+          <a:extLst>
+            <a:ext uri="{909E8E84-426E-40DD-AFC4-6F175D3DCCD1}">
+              <a14:hiddenFill xmlns:a14="http://schemas.microsoft.com/office/drawing/2010/main">
+                <a:solidFill>
+                  <a:srgbClr val="FFFFFF"/>
+                </a:solidFill>
+              </a14:hiddenFill>
+            </a:ext>
+          </a:extLst>
+        </p:spPr>
+      </p:pic>
+      <p:pic>
+        <p:nvPicPr>
+          <p:cNvPr id="1028" name="Picture 4" descr="How the web was born: WWW turns 25"/>
+          <p:cNvPicPr>
+            <a:picLocks noGrp="1" noChangeAspect="1" noChangeArrowheads="1"/>
+          </p:cNvPicPr>
           <p:nvPr>
             <p:ph sz="half" idx="1"/>
           </p:nvPr>
-        </p:nvSpPr>
-        <p:spPr>
+        </p:nvPicPr>
+        <p:blipFill>
+          <a:blip r:embed="rId3" cstate="print">
+            <a:extLst>
+              <a:ext uri="{28A0092B-C50C-407E-A947-70E740481C1C}">
+                <a14:useLocalDpi xmlns:a14="http://schemas.microsoft.com/office/drawing/2010/main" val="0"/>
+              </a:ext>
+            </a:extLst>
+          </a:blip>
+          <a:srcRect/>
+          <a:stretch>
+            <a:fillRect/>
+          </a:stretch>
+        </p:blipFill>
+        <p:spPr bwMode="auto">
           <a:xfrm>
-            <a:off x="571880" y="2157730"/>
-            <a:ext cx="11067670" cy="4262119"/>
+            <a:off x="676275" y="2133203"/>
+            <a:ext cx="4664075" cy="3498056"/>
           </a:xfrm>
+          <a:prstGeom prst="rect">
+            <a:avLst/>
+          </a:prstGeom>
+          <a:noFill/>
+          <a:extLst>
+            <a:ext uri="{909E8E84-426E-40DD-AFC4-6F175D3DCCD1}">
+              <a14:hiddenFill xmlns:a14="http://schemas.microsoft.com/office/drawing/2010/main">
+                <a:solidFill>
+                  <a:srgbClr val="FFFFFF"/>
+                </a:solidFill>
+              </a14:hiddenFill>
+            </a:ext>
+          </a:extLst>
         </p:spPr>
-        <p:txBody>
-          <a:bodyPr>
-            <a:normAutofit fontScale="92500" lnSpcReduction="10000"/>
-          </a:bodyPr>
-          <a:lstStyle/>
-          <a:p>
-            <a:r>
-              <a:rPr lang="ru-RU" dirty="0"/>
-              <a:t>1. Передача данных / </a:t>
-            </a:r>
-            <a:r>
-              <a:rPr lang="ru-RU" dirty="0" err="1"/>
-              <a:t>Web</a:t>
-            </a:r>
-            <a:r>
-              <a:rPr lang="ru-RU" dirty="0"/>
-              <a:t> (HTTP/HTTPS):</a:t>
-            </a:r>
-          </a:p>
-          <a:p>
-            <a:r>
-              <a:rPr lang="ru-RU" dirty="0"/>
-              <a:t>Требование: 100% надёжность (потери недопустимы).</a:t>
-            </a:r>
-          </a:p>
-          <a:p>
-            <a:r>
-              <a:rPr lang="ru-RU" dirty="0"/>
-              <a:t>Чувствительность к задержкам: низкая/средняя.</a:t>
-            </a:r>
-          </a:p>
-          <a:p>
-            <a:r>
-              <a:rPr lang="ru-RU" dirty="0"/>
-              <a:t>2. Потоковое вещание (</a:t>
-            </a:r>
-            <a:r>
-              <a:rPr lang="ru-RU" dirty="0" err="1"/>
-              <a:t>Streaming</a:t>
-            </a:r>
-            <a:r>
-              <a:rPr lang="ru-RU" dirty="0"/>
-              <a:t> </a:t>
-            </a:r>
-            <a:r>
-              <a:rPr lang="ru-RU" dirty="0" err="1"/>
-              <a:t>Audio</a:t>
-            </a:r>
-            <a:r>
-              <a:rPr lang="ru-RU" dirty="0"/>
-              <a:t>/</a:t>
-            </a:r>
-            <a:r>
-              <a:rPr lang="ru-RU" dirty="0" err="1"/>
-              <a:t>Video</a:t>
-            </a:r>
-            <a:r>
-              <a:rPr lang="ru-RU" dirty="0"/>
-              <a:t>):</a:t>
-            </a:r>
-          </a:p>
-          <a:p>
-            <a:r>
-              <a:rPr lang="ru-RU" dirty="0"/>
-              <a:t>Специфика: однонаправленный поток, буферизация.</a:t>
-            </a:r>
-          </a:p>
-          <a:p>
-            <a:r>
-              <a:rPr lang="ru-RU" dirty="0"/>
-              <a:t>Чувствительность к задержке старта: допустимо несколько секунд.</a:t>
-            </a:r>
-          </a:p>
-          <a:p>
-            <a:r>
-              <a:rPr lang="ru-RU" dirty="0"/>
-              <a:t>3. Интерактивные системы реального времени (</a:t>
-            </a:r>
-            <a:r>
-              <a:rPr lang="ru-RU" dirty="0" err="1"/>
-              <a:t>VoIP</a:t>
-            </a:r>
-            <a:r>
-              <a:rPr lang="ru-RU" dirty="0"/>
-              <a:t>, видеосвязь):</a:t>
-            </a:r>
-          </a:p>
-          <a:p>
-            <a:r>
-              <a:rPr lang="ru-RU" dirty="0"/>
-              <a:t>Специфика: двунаправленный поток.</a:t>
-            </a:r>
-          </a:p>
-          <a:p>
-            <a:r>
-              <a:rPr lang="ru-RU" dirty="0"/>
-              <a:t>Требование: минимальная задержка (до 150 </a:t>
-            </a:r>
-            <a:r>
-              <a:rPr lang="ru-RU" dirty="0" err="1"/>
-              <a:t>мс</a:t>
-            </a:r>
-            <a:r>
-              <a:rPr lang="ru-RU" dirty="0"/>
-              <a:t>), устойчивость к </a:t>
-            </a:r>
-            <a:r>
-              <a:rPr lang="ru-RU" dirty="0" err="1"/>
-              <a:t>джиттеру</a:t>
-            </a:r>
-            <a:r>
-              <a:rPr lang="ru-RU" dirty="0"/>
-              <a:t>; частичные потери пакетов допустимы.</a:t>
-            </a:r>
-          </a:p>
-        </p:txBody>
-      </p:sp>
+      </p:pic>
     </p:spTree>
     <p:extLst>
       <p:ext uri="{BB962C8B-B14F-4D97-AF65-F5344CB8AC3E}">
-        <p14:creationId xmlns:p14="http://schemas.microsoft.com/office/powerpoint/2010/main" val="514218111"/>
+        <p14:creationId xmlns:p14="http://schemas.microsoft.com/office/powerpoint/2010/main" val="3885532773"/>
       </p:ext>
     </p:extLst>
   </p:cSld>
@@ -6818,88 +7074,25 @@
           <a:lstStyle/>
           <a:p>
             <a:r>
-              <a:rPr lang="ru-RU" dirty="0"/>
-              <a:t>Требования к архитектуре компьютерных сетей</a:t>
-            </a:r>
-          </a:p>
-        </p:txBody>
-      </p:sp>
-      <p:sp>
-        <p:nvSpPr>
-          <p:cNvPr id="3" name="Объект 2"/>
-          <p:cNvSpPr>
-            <a:spLocks noGrp="1"/>
-          </p:cNvSpPr>
-          <p:nvPr>
-            <p:ph sz="half" idx="1"/>
-          </p:nvPr>
-        </p:nvSpPr>
-        <p:spPr>
-          <a:xfrm>
-            <a:off x="676656" y="1998134"/>
-            <a:ext cx="4663440" cy="3497058"/>
-          </a:xfrm>
-        </p:spPr>
-        <p:txBody>
-          <a:bodyPr>
-            <a:normAutofit/>
-          </a:bodyPr>
-          <a:lstStyle/>
-          <a:p>
-            <a:endParaRPr lang="ru-RU" dirty="0"/>
-          </a:p>
-          <a:p>
-            <a:pPr lvl="1">
-              <a:buFont typeface="Arial" panose="020B0604020202020204" pitchFamily="34" charset="0"/>
-              <a:buChar char="•"/>
-            </a:pPr>
-            <a:r>
-              <a:rPr lang="ru-RU" dirty="0"/>
-              <a:t>Зачем формулировать требования?</a:t>
-            </a:r>
-          </a:p>
-          <a:p>
-            <a:pPr lvl="1">
-              <a:buFont typeface="Arial" panose="020B0604020202020204" pitchFamily="34" charset="0"/>
-              <a:buChar char="•"/>
-            </a:pPr>
-            <a:r>
-              <a:rPr lang="ru-RU" dirty="0"/>
-              <a:t>Три взгляда на одну систему: Пользователь, Разработчик, Оператор</a:t>
-            </a:r>
-          </a:p>
-          <a:p>
-            <a:pPr lvl="1">
-              <a:buFont typeface="Arial" panose="020B0604020202020204" pitchFamily="34" charset="0"/>
-              <a:buChar char="•"/>
-            </a:pPr>
-            <a:r>
-              <a:rPr lang="ru-RU" dirty="0"/>
-              <a:t>Сеть как система архитектурных компромиссов</a:t>
-            </a:r>
-          </a:p>
-          <a:p>
-            <a:r>
-              <a:rPr lang="ru-RU" dirty="0"/>
-              <a:t/>
-            </a:r>
-            <a:br>
-              <a:rPr lang="ru-RU" dirty="0"/>
-            </a:br>
+              <a:rPr lang="ru-RU" dirty="0" smtClean="0"/>
+              <a:t>Потоковое аудио и видео</a:t>
+            </a:r>
             <a:endParaRPr lang="ru-RU" dirty="0"/>
           </a:p>
         </p:txBody>
       </p:sp>
       <p:pic>
         <p:nvPicPr>
-          <p:cNvPr id="1026" name="Picture 2" descr="Проектирование локальных вычислительных сетей (ЛВС) предприятия - на  zwsoft.ru"/>
+          <p:cNvPr id="2050" name="Picture 2" descr="Потоковое видео: что это такое | РБК Компании"/>
           <p:cNvPicPr>
-            <a:picLocks noChangeAspect="1" noChangeArrowheads="1"/>
+            <a:picLocks noGrp="1" noChangeAspect="1" noChangeArrowheads="1"/>
           </p:cNvPicPr>
-          <p:nvPr/>
+          <p:nvPr>
+            <p:ph sz="half" idx="1"/>
+          </p:nvPr>
         </p:nvPicPr>
         <p:blipFill>
-          <a:blip r:embed="rId2">
+          <a:blip r:embed="rId2" cstate="print">
             <a:extLst>
               <a:ext uri="{28A0092B-C50C-407E-A947-70E740481C1C}">
                 <a14:useLocalDpi xmlns:a14="http://schemas.microsoft.com/office/drawing/2010/main" val="0"/>
@@ -6913,8 +7106,51 @@
         </p:blipFill>
         <p:spPr bwMode="auto">
           <a:xfrm>
-            <a:off x="5359528" y="2603296"/>
-            <a:ext cx="6291528" cy="2891896"/>
+            <a:off x="676275" y="2327540"/>
+            <a:ext cx="4664075" cy="3109383"/>
+          </a:xfrm>
+          <a:prstGeom prst="rect">
+            <a:avLst/>
+          </a:prstGeom>
+          <a:noFill/>
+          <a:extLst>
+            <a:ext uri="{909E8E84-426E-40DD-AFC4-6F175D3DCCD1}">
+              <a14:hiddenFill xmlns:a14="http://schemas.microsoft.com/office/drawing/2010/main">
+                <a:solidFill>
+                  <a:srgbClr val="FFFFFF"/>
+                </a:solidFill>
+              </a14:hiddenFill>
+            </a:ext>
+          </a:extLst>
+        </p:spPr>
+      </p:pic>
+      <p:pic>
+        <p:nvPicPr>
+          <p:cNvPr id="2052" name="Picture 4" descr="Программы для потокового видео / Программное обеспечение"/>
+          <p:cNvPicPr>
+            <a:picLocks noGrp="1" noChangeAspect="1" noChangeArrowheads="1"/>
+          </p:cNvPicPr>
+          <p:nvPr>
+            <p:ph sz="half" idx="2"/>
+          </p:nvPr>
+        </p:nvPicPr>
+        <p:blipFill>
+          <a:blip r:embed="rId3">
+            <a:extLst>
+              <a:ext uri="{28A0092B-C50C-407E-A947-70E740481C1C}">
+                <a14:useLocalDpi xmlns:a14="http://schemas.microsoft.com/office/drawing/2010/main" val="0"/>
+              </a:ext>
+            </a:extLst>
+          </a:blip>
+          <a:srcRect/>
+          <a:stretch>
+            <a:fillRect/>
+          </a:stretch>
+        </p:blipFill>
+        <p:spPr bwMode="auto">
+          <a:xfrm>
+            <a:off x="6595965" y="1998663"/>
+            <a:ext cx="3494283" cy="3767137"/>
           </a:xfrm>
           <a:prstGeom prst="rect">
             <a:avLst/>
@@ -6934,7 +7170,7 @@
     </p:spTree>
     <p:extLst>
       <p:ext uri="{BB962C8B-B14F-4D97-AF65-F5344CB8AC3E}">
-        <p14:creationId xmlns:p14="http://schemas.microsoft.com/office/powerpoint/2010/main" val="536911378"/>
+        <p14:creationId xmlns:p14="http://schemas.microsoft.com/office/powerpoint/2010/main" val="2477657477"/>
       </p:ext>
     </p:extLst>
   </p:cSld>
@@ -6973,106 +7209,107 @@
         </p:nvSpPr>
         <p:spPr/>
         <p:txBody>
-          <a:bodyPr>
-            <a:normAutofit fontScale="90000"/>
-          </a:bodyPr>
-          <a:lstStyle/>
-          <a:p>
-            <a:r>
-              <a:rPr lang="ru-RU" dirty="0"/>
-              <a:t>Взгляд пользователя: Производительность </a:t>
-            </a:r>
+          <a:bodyPr/>
+          <a:lstStyle/>
+          <a:p>
             <a:r>
               <a:rPr lang="ru-RU" dirty="0" smtClean="0"/>
-              <a:t>сети</a:t>
-            </a:r>
-            <a:r>
-              <a:rPr lang="ru-RU" b="1" dirty="0"/>
-              <a:t/>
-            </a:r>
-            <a:br>
-              <a:rPr lang="ru-RU" b="1" dirty="0"/>
-            </a:br>
+              <a:t>Видео\аудио в реальном времени</a:t>
+            </a:r>
             <a:endParaRPr lang="ru-RU" dirty="0"/>
           </a:p>
         </p:txBody>
       </p:sp>
-      <p:sp>
-        <p:nvSpPr>
-          <p:cNvPr id="3" name="Объект 2"/>
-          <p:cNvSpPr>
-            <a:spLocks noGrp="1"/>
-          </p:cNvSpPr>
+      <p:pic>
+        <p:nvPicPr>
+          <p:cNvPr id="3074" name="Picture 2" descr="Teleport | Online Video Conferencing Software"/>
+          <p:cNvPicPr>
+            <a:picLocks noGrp="1" noChangeAspect="1" noChangeArrowheads="1"/>
+          </p:cNvPicPr>
           <p:nvPr>
             <p:ph sz="half" idx="1"/>
           </p:nvPr>
-        </p:nvSpPr>
-        <p:spPr>
+        </p:nvPicPr>
+        <p:blipFill>
+          <a:blip r:embed="rId2" cstate="print">
+            <a:extLst>
+              <a:ext uri="{28A0092B-C50C-407E-A947-70E740481C1C}">
+                <a14:useLocalDpi xmlns:a14="http://schemas.microsoft.com/office/drawing/2010/main" val="0"/>
+              </a:ext>
+            </a:extLst>
+          </a:blip>
+          <a:srcRect/>
+          <a:stretch>
+            <a:fillRect/>
+          </a:stretch>
+        </p:blipFill>
+        <p:spPr bwMode="auto">
           <a:xfrm>
-            <a:off x="520942" y="3010585"/>
-            <a:ext cx="11045338" cy="2018615"/>
+            <a:off x="676275" y="2052625"/>
+            <a:ext cx="4664075" cy="3659213"/>
           </a:xfrm>
+          <a:prstGeom prst="rect">
+            <a:avLst/>
+          </a:prstGeom>
+          <a:noFill/>
+          <a:extLst>
+            <a:ext uri="{909E8E84-426E-40DD-AFC4-6F175D3DCCD1}">
+              <a14:hiddenFill xmlns:a14="http://schemas.microsoft.com/office/drawing/2010/main">
+                <a:solidFill>
+                  <a:srgbClr val="FFFFFF"/>
+                </a:solidFill>
+              </a14:hiddenFill>
+            </a:ext>
+          </a:extLst>
         </p:spPr>
-        <p:txBody>
-          <a:bodyPr/>
-          <a:lstStyle/>
-          <a:p>
-            <a:r>
-              <a:rPr lang="ru-RU" dirty="0" err="1"/>
-              <a:t>Bandwidth</a:t>
-            </a:r>
-            <a:r>
-              <a:rPr lang="ru-RU" dirty="0"/>
-              <a:t> (Пропускная </a:t>
-            </a:r>
-            <a:r>
-              <a:rPr lang="ru-RU" dirty="0" smtClean="0"/>
-              <a:t>способность) - объем </a:t>
-            </a:r>
-            <a:r>
-              <a:rPr lang="ru-RU" dirty="0"/>
-              <a:t>данных, передаваемый в единицу времени (измеряется в битах в секунду, бит/с).</a:t>
-            </a:r>
-          </a:p>
-          <a:p>
-            <a:pPr lvl="1"/>
-            <a:endParaRPr lang="ru-RU" dirty="0"/>
-          </a:p>
-          <a:p>
-            <a:r>
-              <a:rPr lang="ru-RU" dirty="0" err="1"/>
-              <a:t>Latency</a:t>
-            </a:r>
-            <a:r>
-              <a:rPr lang="ru-RU" dirty="0"/>
-              <a:t> (Задержка</a:t>
-            </a:r>
-            <a:r>
-              <a:rPr lang="ru-RU" dirty="0" smtClean="0"/>
-              <a:t>) - </a:t>
-            </a:r>
-            <a:r>
-              <a:rPr lang="ru-RU" dirty="0"/>
-              <a:t>время, которое требуется одному биту данных, чтобы пройти от отправителя до получателя (измеряется в миллисекундах, </a:t>
-            </a:r>
-            <a:r>
-              <a:rPr lang="ru-RU" dirty="0" err="1"/>
-              <a:t>мс</a:t>
-            </a:r>
-            <a:r>
-              <a:rPr lang="ru-RU" dirty="0"/>
-              <a:t>).</a:t>
-            </a:r>
-          </a:p>
-          <a:p>
-            <a:endParaRPr lang="ru-RU" dirty="0"/>
-          </a:p>
-        </p:txBody>
-      </p:sp>
+      </p:pic>
+      <p:pic>
+        <p:nvPicPr>
+          <p:cNvPr id="3076" name="Picture 4" descr="MicroSIP - Reliable SIP Softphone for Windows"/>
+          <p:cNvPicPr>
+            <a:picLocks noGrp="1" noChangeAspect="1" noChangeArrowheads="1"/>
+          </p:cNvPicPr>
+          <p:nvPr>
+            <p:ph sz="half" idx="2"/>
+          </p:nvPr>
+        </p:nvPicPr>
+        <p:blipFill>
+          <a:blip r:embed="rId3">
+            <a:extLst>
+              <a:ext uri="{28A0092B-C50C-407E-A947-70E740481C1C}">
+                <a14:useLocalDpi xmlns:a14="http://schemas.microsoft.com/office/drawing/2010/main" val="0"/>
+              </a:ext>
+            </a:extLst>
+          </a:blip>
+          <a:srcRect/>
+          <a:stretch>
+            <a:fillRect/>
+          </a:stretch>
+        </p:blipFill>
+        <p:spPr bwMode="auto">
+          <a:xfrm>
+            <a:off x="7258171" y="1998663"/>
+            <a:ext cx="2169870" cy="3767137"/>
+          </a:xfrm>
+          <a:prstGeom prst="rect">
+            <a:avLst/>
+          </a:prstGeom>
+          <a:noFill/>
+          <a:extLst>
+            <a:ext uri="{909E8E84-426E-40DD-AFC4-6F175D3DCCD1}">
+              <a14:hiddenFill xmlns:a14="http://schemas.microsoft.com/office/drawing/2010/main">
+                <a:solidFill>
+                  <a:srgbClr val="FFFFFF"/>
+                </a:solidFill>
+              </a14:hiddenFill>
+            </a:ext>
+          </a:extLst>
+        </p:spPr>
+      </p:pic>
     </p:spTree>
     <p:extLst>
       <p:ext uri="{BB962C8B-B14F-4D97-AF65-F5344CB8AC3E}">
-        <p14:creationId xmlns:p14="http://schemas.microsoft.com/office/powerpoint/2010/main" val="904879319"/>
+        <p14:creationId xmlns:p14="http://schemas.microsoft.com/office/powerpoint/2010/main" val="2325034088"/>
       </p:ext>
     </p:extLst>
   </p:cSld>
